--- a/10-Knowledge-Products/KP1-GEA/videos/module_4/en/decks/KP1_M4_4.5_Deck_v0.2.pptx
+++ b/10-Knowledge-Products/KP1-GEA/videos/module_4/en/decks/KP1_M4_4.5_Deck_v0.2.pptx
@@ -14,14 +14,14 @@
     <p:handoutMasterId r:id="rId47"/>
   </p:handoutMasterIdLst>
   <p:sldIdLst>
-    <p:sldId id="2681" r:id="rId8"/>
-    <p:sldId id="2724" r:id="rId17"/>
-    <p:sldId id="2725" r:id="rId16"/>
-    <p:sldId id="2726" r:id="rId15"/>
-    <p:sldId id="2727" r:id="rId14"/>
     <p:sldId id="2728" r:id="rId13"/>
     <p:sldId id="2729" r:id="rId12"/>
     <p:sldId id="2730" r:id="rId11"/>
+    <p:sldId id="2731" r:id="rId10"/>
+    <p:sldId id="2732" r:id="rId54"/>
+    <p:sldId id="2733" r:id="rId55"/>
+    <p:sldId id="2734" r:id="rId56"/>
+    <p:sldId id="2735" r:id="rId57"/>
   </p:sldIdLst>
   <p:sldSz cx="12192000" cy="6858000"/>
   <p:notesSz cx="6858000" cy="9144000"/>
@@ -888,356 +888,6 @@
 </p:notesMaster>
 </file>
 
-<file path=ppt/notesSlides/notesSlide21.xml><?xml version="1.0" encoding="utf-8"?>
-<p:notes xmlns:a="http://schemas.openxmlformats.org/drawingml/2006/main" xmlns:p="http://schemas.openxmlformats.org/presentationml/2006/main" xmlns:r="http://schemas.openxmlformats.org/officeDocument/2006/relationships">
-  <p:cSld>
-    <p:spTree>
-      <p:nvGrpSpPr>
-        <p:cNvPr id="1" name=""/>
-        <p:cNvGrpSpPr/>
-        <p:nvPr/>
-      </p:nvGrpSpPr>
-      <p:grpSpPr>
-        <a:xfrm>
-          <a:off x="0" y="0"/>
-          <a:ext cx="0" cy="0"/>
-          <a:chOff x="0" y="0"/>
-          <a:chExt cx="0" cy="0"/>
-        </a:xfrm>
-      </p:grpSpPr>
-      <p:sp>
-        <p:nvSpPr>
-          <p:cNvPr id="2" name="Slide Image Placeholder 1"/>
-          <p:cNvSpPr>
-            <a:spLocks noGrp="1"/>
-          </p:cNvSpPr>
-          <p:nvPr>
-            <p:ph type="sldImg" idx="2"/>
-          </p:nvPr>
-        </p:nvSpPr>
-        <p:spPr/>
-      </p:sp>
-      <p:sp>
-        <p:nvSpPr>
-          <p:cNvPr id="3" name="Notes Placeholder 2"/>
-          <p:cNvSpPr>
-            <a:spLocks noGrp="1"/>
-          </p:cNvSpPr>
-          <p:nvPr>
-            <p:ph type="body" idx="3" sz="quarter"/>
-          </p:nvPr>
-        </p:nvSpPr>
-        <p:spPr/>
-        <p:txBody>
-          <a:bodyPr/>
-          <a:lstStyle/>
-          <a:p>
-            <a:r>
-              <a:t>Title card for standalone video 4.5. Content slides are identical to the corresponding section of the combined deck KP1_M4_Deck_v0.2.pptx; voice-over is in each slide’s notes.</a:t>
-            </a:r>
-          </a:p>
-        </p:txBody>
-      </p:sp>
-      <p:sp>
-        <p:nvSpPr>
-          <p:cNvPr id="4" name="Slide Number Placeholder 3"/>
-          <p:cNvSpPr>
-            <a:spLocks noGrp="1"/>
-          </p:cNvSpPr>
-          <p:nvPr>
-            <p:ph type="sldNum" idx="5" sz="quarter"/>
-          </p:nvPr>
-        </p:nvSpPr>
-        <p:spPr/>
-      </p:sp>
-    </p:spTree>
-  </p:cSld>
-  <p:clrMapOvr>
-    <a:masterClrMapping/>
-  </p:clrMapOvr>
-</p:notes>
-</file>
-
-<file path=ppt/notesSlides/notesSlide31.xml><?xml version="1.0" encoding="utf-8"?>
-<p:notes xmlns:a="http://schemas.openxmlformats.org/drawingml/2006/main" xmlns:p="http://schemas.openxmlformats.org/presentationml/2006/main" xmlns:r="http://schemas.openxmlformats.org/officeDocument/2006/relationships">
-  <p:cSld>
-    <p:spTree>
-      <p:nvGrpSpPr>
-        <p:cNvPr id="1" name=""/>
-        <p:cNvGrpSpPr/>
-        <p:nvPr/>
-      </p:nvGrpSpPr>
-      <p:grpSpPr>
-        <a:xfrm>
-          <a:off x="0" y="0"/>
-          <a:ext cx="0" cy="0"/>
-          <a:chOff x="0" y="0"/>
-          <a:chExt cx="0" cy="0"/>
-        </a:xfrm>
-      </p:grpSpPr>
-      <p:sp>
-        <p:nvSpPr>
-          <p:cNvPr id="2" name="Slide Image Placeholder 1"/>
-          <p:cNvSpPr>
-            <a:spLocks noGrp="1"/>
-          </p:cNvSpPr>
-          <p:nvPr>
-            <p:ph type="sldImg" idx="2"/>
-          </p:nvPr>
-        </p:nvSpPr>
-        <p:spPr/>
-      </p:sp>
-      <p:sp>
-        <p:nvSpPr>
-          <p:cNvPr id="3" name="Notes Placeholder 2"/>
-          <p:cNvSpPr>
-            <a:spLocks noGrp="1"/>
-          </p:cNvSpPr>
-          <p:nvPr>
-            <p:ph type="body" idx="3" sz="quarter"/>
-          </p:nvPr>
-        </p:nvSpPr>
-        <p:spPr/>
-        <p:txBody>
-          <a:bodyPr/>
-          <a:lstStyle/>
-          <a:p>
-            <a:r>
-              <a:t>VO, slide 1: Between where Progressa is today and how it gets somewhere sits the deliverable the whole architecture exists to produce: the target architecture, the picture of the future state you are building toward. Skip it, and you sequence a roadmap to a destination nobody drew.</a:t>
-            </a:r>
-          </a:p>
-        </p:txBody>
-      </p:sp>
-      <p:sp>
-        <p:nvSpPr>
-          <p:cNvPr id="4" name="Slide Number Placeholder 3"/>
-          <p:cNvSpPr>
-            <a:spLocks noGrp="1"/>
-          </p:cNvSpPr>
-          <p:nvPr>
-            <p:ph type="sldNum" idx="5" sz="quarter"/>
-          </p:nvPr>
-        </p:nvSpPr>
-        <p:spPr/>
-      </p:sp>
-    </p:spTree>
-  </p:cSld>
-  <p:clrMapOvr>
-    <a:masterClrMapping/>
-  </p:clrMapOvr>
-</p:notes>
-</file>
-
-<file path=ppt/notesSlides/notesSlide32.xml><?xml version="1.0" encoding="utf-8"?>
-<p:notes xmlns:a="http://schemas.openxmlformats.org/drawingml/2006/main" xmlns:p="http://schemas.openxmlformats.org/presentationml/2006/main" xmlns:r="http://schemas.openxmlformats.org/officeDocument/2006/relationships">
-  <p:cSld>
-    <p:spTree>
-      <p:nvGrpSpPr>
-        <p:cNvPr id="1" name=""/>
-        <p:cNvGrpSpPr/>
-        <p:nvPr/>
-      </p:nvGrpSpPr>
-      <p:grpSpPr>
-        <a:xfrm>
-          <a:off x="0" y="0"/>
-          <a:ext cx="0" cy="0"/>
-          <a:chOff x="0" y="0"/>
-          <a:chExt cx="0" cy="0"/>
-        </a:xfrm>
-      </p:grpSpPr>
-      <p:sp>
-        <p:nvSpPr>
-          <p:cNvPr id="2" name="Slide Image Placeholder 1"/>
-          <p:cNvSpPr>
-            <a:spLocks noGrp="1"/>
-          </p:cNvSpPr>
-          <p:nvPr>
-            <p:ph type="sldImg" idx="2"/>
-          </p:nvPr>
-        </p:nvSpPr>
-        <p:spPr/>
-      </p:sp>
-      <p:sp>
-        <p:nvSpPr>
-          <p:cNvPr id="3" name="Notes Placeholder 2"/>
-          <p:cNvSpPr>
-            <a:spLocks noGrp="1"/>
-          </p:cNvSpPr>
-          <p:nvPr>
-            <p:ph type="body" idx="3" sz="quarter"/>
-          </p:nvPr>
-        </p:nvSpPr>
-        <p:spPr/>
-        <p:txBody>
-          <a:bodyPr/>
-          <a:lstStyle/>
-          <a:p>
-            <a:r>
-              <a:t>VO: The target architecture is the future-state picture, drawn in the same four layers you used for the current state — but designed, not observed. The target capability map: each capability owned by exactly one body, the duplicates resolved. The target data domains: one authoritative owner for the learner, the person, the result — the three lists collapsed to one. The target shared platforms: the identity platform and the data-exchange backbone every sector will consume. And the target technology standards. It is the current-state picture's mirror — what the sector should look like once the gaps are closed.</a:t>
-            </a:r>
-          </a:p>
-        </p:txBody>
-      </p:sp>
-      <p:sp>
-        <p:nvSpPr>
-          <p:cNvPr id="4" name="Slide Number Placeholder 3"/>
-          <p:cNvSpPr>
-            <a:spLocks noGrp="1"/>
-          </p:cNvSpPr>
-          <p:nvPr>
-            <p:ph type="sldNum" idx="5" sz="quarter"/>
-          </p:nvPr>
-        </p:nvSpPr>
-        <p:spPr/>
-      </p:sp>
-    </p:spTree>
-  </p:cSld>
-  <p:clrMapOvr>
-    <a:masterClrMapping/>
-  </p:clrMapOvr>
-</p:notes>
-</file>
-
-<file path=ppt/notesSlides/notesSlide33.xml><?xml version="1.0" encoding="utf-8"?>
-<p:notes xmlns:a="http://schemas.openxmlformats.org/drawingml/2006/main" xmlns:p="http://schemas.openxmlformats.org/presentationml/2006/main" xmlns:r="http://schemas.openxmlformats.org/officeDocument/2006/relationships">
-  <p:cSld>
-    <p:spTree>
-      <p:nvGrpSpPr>
-        <p:cNvPr id="1" name=""/>
-        <p:cNvGrpSpPr/>
-        <p:nvPr/>
-      </p:nvGrpSpPr>
-      <p:grpSpPr>
-        <a:xfrm>
-          <a:off x="0" y="0"/>
-          <a:ext cx="0" cy="0"/>
-          <a:chOff x="0" y="0"/>
-          <a:chExt cx="0" cy="0"/>
-        </a:xfrm>
-      </p:grpSpPr>
-      <p:sp>
-        <p:nvSpPr>
-          <p:cNvPr id="2" name="Slide Image Placeholder 1"/>
-          <p:cNvSpPr>
-            <a:spLocks noGrp="1"/>
-          </p:cNvSpPr>
-          <p:nvPr>
-            <p:ph type="sldImg" idx="2"/>
-          </p:nvPr>
-        </p:nvSpPr>
-        <p:spPr/>
-      </p:sp>
-      <p:sp>
-        <p:nvSpPr>
-          <p:cNvPr id="3" name="Notes Placeholder 2"/>
-          <p:cNvSpPr>
-            <a:spLocks noGrp="1"/>
-          </p:cNvSpPr>
-          <p:nvPr>
-            <p:ph type="body" idx="3" sz="quarter"/>
-          </p:nvPr>
-        </p:nvSpPr>
-        <p:spPr/>
-        <p:txBody>
-          <a:bodyPr/>
-          <a:lstStyle/>
-          <a:p>
-            <a:r>
-              <a:t>VO: You do not invent the target from imagination. You design it by applying the principles you adopted in Adapt to the gaps you found in Assess. Once-only says the three learner lists become one — so the target has a single authoritative Learner Registry. Reuse-before-build says education consumes the national identity rather than minting its own — so the target shows the Examination Authority consuming the Identity Authority. One-owner-per-domain resolves who owns what. The principles are not decoration; they are the design rules. Apply them to the current state, and the target architecture almost draws itself.</a:t>
-            </a:r>
-          </a:p>
-        </p:txBody>
-      </p:sp>
-      <p:sp>
-        <p:nvSpPr>
-          <p:cNvPr id="4" name="Slide Number Placeholder 3"/>
-          <p:cNvSpPr>
-            <a:spLocks noGrp="1"/>
-          </p:cNvSpPr>
-          <p:nvPr>
-            <p:ph type="sldNum" idx="5" sz="quarter"/>
-          </p:nvPr>
-        </p:nvSpPr>
-        <p:spPr/>
-      </p:sp>
-    </p:spTree>
-  </p:cSld>
-  <p:clrMapOvr>
-    <a:masterClrMapping/>
-  </p:clrMapOvr>
-</p:notes>
-</file>
-
-<file path=ppt/notesSlides/notesSlide34.xml><?xml version="1.0" encoding="utf-8"?>
-<p:notes xmlns:a="http://schemas.openxmlformats.org/drawingml/2006/main" xmlns:p="http://schemas.openxmlformats.org/presentationml/2006/main" xmlns:r="http://schemas.openxmlformats.org/officeDocument/2006/relationships">
-  <p:cSld>
-    <p:spTree>
-      <p:nvGrpSpPr>
-        <p:cNvPr id="1" name=""/>
-        <p:cNvGrpSpPr/>
-        <p:nvPr/>
-      </p:nvGrpSpPr>
-      <p:grpSpPr>
-        <a:xfrm>
-          <a:off x="0" y="0"/>
-          <a:ext cx="0" cy="0"/>
-          <a:chOff x="0" y="0"/>
-          <a:chExt cx="0" cy="0"/>
-        </a:xfrm>
-      </p:grpSpPr>
-      <p:sp>
-        <p:nvSpPr>
-          <p:cNvPr id="2" name="Slide Image Placeholder 1"/>
-          <p:cNvSpPr>
-            <a:spLocks noGrp="1"/>
-          </p:cNvSpPr>
-          <p:nvPr>
-            <p:ph type="sldImg" idx="2"/>
-          </p:nvPr>
-        </p:nvSpPr>
-        <p:spPr/>
-      </p:sp>
-      <p:sp>
-        <p:nvSpPr>
-          <p:cNvPr id="3" name="Notes Placeholder 2"/>
-          <p:cNvSpPr>
-            <a:spLocks noGrp="1"/>
-          </p:cNvSpPr>
-          <p:nvPr>
-            <p:ph type="body" idx="3" sz="quarter"/>
-          </p:nvPr>
-        </p:nvSpPr>
-        <p:spPr/>
-        <p:txBody>
-          <a:bodyPr/>
-          <a:lstStyle/>
-          <a:p>
-            <a:r>
-              <a:t>VO: The target adds one artefact the current state never had: the integration map. It names which bodies need to exchange which data, over what mechanism, in what priority order. On Progressa: the Examination Authority reads the learner from the Learner Registry and the identity from the Identity Authority, both over the Digital Government Authority's data-exchange backbone, replacing the paper re-entry. The integration map is the target's connective tissue — the picture of a government whose systems finally talk to each other. Here you draw it as a first cut; designing those exchanges in full detail is the interoperability work that the next knowledge product covers.</a:t>
-            </a:r>
-          </a:p>
-        </p:txBody>
-      </p:sp>
-      <p:sp>
-        <p:nvSpPr>
-          <p:cNvPr id="4" name="Slide Number Placeholder 3"/>
-          <p:cNvSpPr>
-            <a:spLocks noGrp="1"/>
-          </p:cNvSpPr>
-          <p:nvPr>
-            <p:ph type="sldNum" idx="5" sz="quarter"/>
-          </p:nvPr>
-        </p:nvSpPr>
-        <p:spPr/>
-      </p:sp>
-    </p:spTree>
-  </p:cSld>
-  <p:clrMapOvr>
-    <a:masterClrMapping/>
-  </p:clrMapOvr>
-</p:notes>
-</file>
-
 <file path=ppt/notesSlides/notesSlide35.xml><?xml version="1.0" encoding="utf-8"?>
 <p:notes xmlns:a="http://schemas.openxmlformats.org/drawingml/2006/main" xmlns:p="http://schemas.openxmlformats.org/presentationml/2006/main" xmlns:r="http://schemas.openxmlformats.org/officeDocument/2006/relationships">
   <p:cSld>
@@ -1283,7 +933,7 @@
           <a:lstStyle/>
           <a:p>
             <a:r>
-              <a:t>VO: One discipline keeps the target useful. It must be reachable, not a fantasy. Every element of the target should trace back to a gap it closes and forward to a sourcing decision — build, buy or share — that obtains it. A target capability with no way to build or acquire it is a wish, not an architecture. So the target architecture and the sourcing decisions are designed together: the target says what the future state is; the sourcing says how each piece is obtained. Signed off together, they are the agreed destination the roadmap then sequences.</a:t>
+              <a:t>Title card — the cold open. The hosts name the module, the video number, the title and the single message on this slide; no scripted narration. Hold until the opener begins; the opener is narrated on the next slide.</a:t>
             </a:r>
           </a:p>
         </p:txBody>
@@ -1353,13 +1003,7 @@
           <a:lstStyle/>
           <a:p>
             <a:r>
-              <a:t>PRACTICE BOX (on-screen only — never read it, never paraphrase it, never point at it). It replaces the narrated handoff: this video ends on the recap and the Sources slide.</a:t>
-            </a:r>
-          </a:p>
-          <a:p/>
-          <a:p>
-            <a:r>
-              <a:t>VO: So before you sequence anything, design the target: the future-state picture in four layers plus the integration map, reached by applying your principles to the gaps you found, every element traceable to a sourcing decision.</a:t>
+              <a:t>VO: Between where Progressa is today and how it gets somewhere sits the deliverable the whole architecture exists to produce: the target architecture, the picture of the future state you are building toward. Skip it, and you sequence a roadmap to a destination nobody drew.</a:t>
             </a:r>
           </a:p>
         </p:txBody>
@@ -1385,6 +1029,362 @@
 </file>
 
 <file path=ppt/notesSlides/notesSlide37.xml><?xml version="1.0" encoding="utf-8"?>
+<p:notes xmlns:a="http://schemas.openxmlformats.org/drawingml/2006/main" xmlns:p="http://schemas.openxmlformats.org/presentationml/2006/main" xmlns:r="http://schemas.openxmlformats.org/officeDocument/2006/relationships">
+  <p:cSld>
+    <p:spTree>
+      <p:nvGrpSpPr>
+        <p:cNvPr id="1" name=""/>
+        <p:cNvGrpSpPr/>
+        <p:nvPr/>
+      </p:nvGrpSpPr>
+      <p:grpSpPr>
+        <a:xfrm>
+          <a:off x="0" y="0"/>
+          <a:ext cx="0" cy="0"/>
+          <a:chOff x="0" y="0"/>
+          <a:chExt cx="0" cy="0"/>
+        </a:xfrm>
+      </p:grpSpPr>
+      <p:sp>
+        <p:nvSpPr>
+          <p:cNvPr id="2" name="Slide Image Placeholder 1"/>
+          <p:cNvSpPr>
+            <a:spLocks noGrp="1"/>
+          </p:cNvSpPr>
+          <p:nvPr>
+            <p:ph type="sldImg" idx="2"/>
+          </p:nvPr>
+        </p:nvSpPr>
+        <p:spPr/>
+      </p:sp>
+      <p:sp>
+        <p:nvSpPr>
+          <p:cNvPr id="3" name="Notes Placeholder 2"/>
+          <p:cNvSpPr>
+            <a:spLocks noGrp="1"/>
+          </p:cNvSpPr>
+          <p:nvPr>
+            <p:ph type="body" idx="3" sz="quarter"/>
+          </p:nvPr>
+        </p:nvSpPr>
+        <p:spPr/>
+        <p:txBody>
+          <a:bodyPr/>
+          <a:lstStyle/>
+          <a:p>
+            <a:r>
+              <a:t>VO: The target architecture is the future-state picture, drawn in the same four layers you used for the current state — but designed, not observed. The target capability map: each capability owned by exactly one body, the duplicates resolved. The target data domains: one authoritative owner for the learner, the person, the result — the three lists collapsed to one. The target shared platforms: the identity platform and the data-exchange backbone every sector will consume. And the target technology standards. It is the current-state picture's mirror — what the sector should look like once the gaps are closed.</a:t>
+            </a:r>
+          </a:p>
+        </p:txBody>
+      </p:sp>
+      <p:sp>
+        <p:nvSpPr>
+          <p:cNvPr id="4" name="Slide Number Placeholder 3"/>
+          <p:cNvSpPr>
+            <a:spLocks noGrp="1"/>
+          </p:cNvSpPr>
+          <p:nvPr>
+            <p:ph type="sldNum" idx="5" sz="quarter"/>
+          </p:nvPr>
+        </p:nvSpPr>
+        <p:spPr/>
+      </p:sp>
+    </p:spTree>
+  </p:cSld>
+  <p:clrMapOvr>
+    <a:masterClrMapping/>
+  </p:clrMapOvr>
+</p:notes>
+</file>
+
+<file path=ppt/notesSlides/notesSlide38.xml><?xml version="1.0" encoding="utf-8"?>
+<p:notes xmlns:a="http://schemas.openxmlformats.org/drawingml/2006/main" xmlns:p="http://schemas.openxmlformats.org/presentationml/2006/main" xmlns:r="http://schemas.openxmlformats.org/officeDocument/2006/relationships">
+  <p:cSld>
+    <p:spTree>
+      <p:nvGrpSpPr>
+        <p:cNvPr id="1" name=""/>
+        <p:cNvGrpSpPr/>
+        <p:nvPr/>
+      </p:nvGrpSpPr>
+      <p:grpSpPr>
+        <a:xfrm>
+          <a:off x="0" y="0"/>
+          <a:ext cx="0" cy="0"/>
+          <a:chOff x="0" y="0"/>
+          <a:chExt cx="0" cy="0"/>
+        </a:xfrm>
+      </p:grpSpPr>
+      <p:sp>
+        <p:nvSpPr>
+          <p:cNvPr id="2" name="Slide Image Placeholder 1"/>
+          <p:cNvSpPr>
+            <a:spLocks noGrp="1"/>
+          </p:cNvSpPr>
+          <p:nvPr>
+            <p:ph type="sldImg" idx="2"/>
+          </p:nvPr>
+        </p:nvSpPr>
+        <p:spPr/>
+      </p:sp>
+      <p:sp>
+        <p:nvSpPr>
+          <p:cNvPr id="3" name="Notes Placeholder 2"/>
+          <p:cNvSpPr>
+            <a:spLocks noGrp="1"/>
+          </p:cNvSpPr>
+          <p:nvPr>
+            <p:ph type="body" idx="3" sz="quarter"/>
+          </p:nvPr>
+        </p:nvSpPr>
+        <p:spPr/>
+        <p:txBody>
+          <a:bodyPr/>
+          <a:lstStyle/>
+          <a:p>
+            <a:r>
+              <a:t>VO: You do not invent the target from imagination. You design it by applying the principles you adopted in Adapt to the gaps you found in Assess. Once-only says the three learner lists become one — so the target has a single authoritative Learner Registry. Reuse-before-build says education consumes the national identity rather than minting its own — so the target shows the Examination Authority consuming the Identity Authority. One-owner-per-domain resolves who owns what. The principles are not decoration; they are the design rules. Apply them to the current state, and the target architecture almost draws itself.</a:t>
+            </a:r>
+          </a:p>
+        </p:txBody>
+      </p:sp>
+      <p:sp>
+        <p:nvSpPr>
+          <p:cNvPr id="4" name="Slide Number Placeholder 3"/>
+          <p:cNvSpPr>
+            <a:spLocks noGrp="1"/>
+          </p:cNvSpPr>
+          <p:nvPr>
+            <p:ph type="sldNum" idx="5" sz="quarter"/>
+          </p:nvPr>
+        </p:nvSpPr>
+        <p:spPr/>
+      </p:sp>
+    </p:spTree>
+  </p:cSld>
+  <p:clrMapOvr>
+    <a:masterClrMapping/>
+  </p:clrMapOvr>
+</p:notes>
+</file>
+
+<file path=ppt/notesSlides/notesSlide39.xml><?xml version="1.0" encoding="utf-8"?>
+<p:notes xmlns:a="http://schemas.openxmlformats.org/drawingml/2006/main" xmlns:p="http://schemas.openxmlformats.org/presentationml/2006/main" xmlns:r="http://schemas.openxmlformats.org/officeDocument/2006/relationships">
+  <p:cSld>
+    <p:spTree>
+      <p:nvGrpSpPr>
+        <p:cNvPr id="1" name=""/>
+        <p:cNvGrpSpPr/>
+        <p:nvPr/>
+      </p:nvGrpSpPr>
+      <p:grpSpPr>
+        <a:xfrm>
+          <a:off x="0" y="0"/>
+          <a:ext cx="0" cy="0"/>
+          <a:chOff x="0" y="0"/>
+          <a:chExt cx="0" cy="0"/>
+        </a:xfrm>
+      </p:grpSpPr>
+      <p:sp>
+        <p:nvSpPr>
+          <p:cNvPr id="2" name="Slide Image Placeholder 1"/>
+          <p:cNvSpPr>
+            <a:spLocks noGrp="1"/>
+          </p:cNvSpPr>
+          <p:nvPr>
+            <p:ph type="sldImg" idx="2"/>
+          </p:nvPr>
+        </p:nvSpPr>
+        <p:spPr/>
+      </p:sp>
+      <p:sp>
+        <p:nvSpPr>
+          <p:cNvPr id="3" name="Notes Placeholder 2"/>
+          <p:cNvSpPr>
+            <a:spLocks noGrp="1"/>
+          </p:cNvSpPr>
+          <p:nvPr>
+            <p:ph type="body" idx="3" sz="quarter"/>
+          </p:nvPr>
+        </p:nvSpPr>
+        <p:spPr/>
+        <p:txBody>
+          <a:bodyPr/>
+          <a:lstStyle/>
+          <a:p>
+            <a:r>
+              <a:t>VO: The target adds one artefact the current state never had: the integration map. It names which bodies need to exchange which data, over what mechanism, in what priority order. On Progressa: the Examination Authority reads the learner from the Learner Registry and the identity from the Identity Authority, both over the Digital Government Authority's data-exchange backbone, replacing the paper re-entry. The integration map is the target's connective tissue — the picture of a government whose systems finally talk to each other. Here you draw it as a first cut; designing those exchanges in full detail is the interoperability work that the next knowledge product covers.</a:t>
+            </a:r>
+          </a:p>
+        </p:txBody>
+      </p:sp>
+      <p:sp>
+        <p:nvSpPr>
+          <p:cNvPr id="4" name="Slide Number Placeholder 3"/>
+          <p:cNvSpPr>
+            <a:spLocks noGrp="1"/>
+          </p:cNvSpPr>
+          <p:nvPr>
+            <p:ph type="sldNum" idx="5" sz="quarter"/>
+          </p:nvPr>
+        </p:nvSpPr>
+        <p:spPr/>
+      </p:sp>
+    </p:spTree>
+  </p:cSld>
+  <p:clrMapOvr>
+    <a:masterClrMapping/>
+  </p:clrMapOvr>
+</p:notes>
+</file>
+
+<file path=ppt/notesSlides/notesSlide40.xml><?xml version="1.0" encoding="utf-8"?>
+<p:notes xmlns:a="http://schemas.openxmlformats.org/drawingml/2006/main" xmlns:p="http://schemas.openxmlformats.org/presentationml/2006/main" xmlns:r="http://schemas.openxmlformats.org/officeDocument/2006/relationships">
+  <p:cSld>
+    <p:spTree>
+      <p:nvGrpSpPr>
+        <p:cNvPr id="1" name=""/>
+        <p:cNvGrpSpPr/>
+        <p:nvPr/>
+      </p:nvGrpSpPr>
+      <p:grpSpPr>
+        <a:xfrm>
+          <a:off x="0" y="0"/>
+          <a:ext cx="0" cy="0"/>
+          <a:chOff x="0" y="0"/>
+          <a:chExt cx="0" cy="0"/>
+        </a:xfrm>
+      </p:grpSpPr>
+      <p:sp>
+        <p:nvSpPr>
+          <p:cNvPr id="2" name="Slide Image Placeholder 1"/>
+          <p:cNvSpPr>
+            <a:spLocks noGrp="1"/>
+          </p:cNvSpPr>
+          <p:nvPr>
+            <p:ph type="sldImg" idx="2"/>
+          </p:nvPr>
+        </p:nvSpPr>
+        <p:spPr/>
+      </p:sp>
+      <p:sp>
+        <p:nvSpPr>
+          <p:cNvPr id="3" name="Notes Placeholder 2"/>
+          <p:cNvSpPr>
+            <a:spLocks noGrp="1"/>
+          </p:cNvSpPr>
+          <p:nvPr>
+            <p:ph type="body" idx="3" sz="quarter"/>
+          </p:nvPr>
+        </p:nvSpPr>
+        <p:spPr/>
+        <p:txBody>
+          <a:bodyPr/>
+          <a:lstStyle/>
+          <a:p>
+            <a:r>
+              <a:t>VO: One discipline keeps the target useful. It must be reachable, not a fantasy. Every element of the target should trace back to a gap it closes and forward to a sourcing decision — build, buy or share — that obtains it. A target capability with no way to build or acquire it is a wish, not an architecture. So the target architecture and the sourcing decisions are designed together: the target says what the future state is; the sourcing says how each piece is obtained. Signed off together, they are the agreed destination the roadmap then sequences.</a:t>
+            </a:r>
+          </a:p>
+        </p:txBody>
+      </p:sp>
+      <p:sp>
+        <p:nvSpPr>
+          <p:cNvPr id="4" name="Slide Number Placeholder 3"/>
+          <p:cNvSpPr>
+            <a:spLocks noGrp="1"/>
+          </p:cNvSpPr>
+          <p:nvPr>
+            <p:ph type="sldNum" idx="5" sz="quarter"/>
+          </p:nvPr>
+        </p:nvSpPr>
+        <p:spPr/>
+      </p:sp>
+    </p:spTree>
+  </p:cSld>
+  <p:clrMapOvr>
+    <a:masterClrMapping/>
+  </p:clrMapOvr>
+</p:notes>
+</file>
+
+<file path=ppt/notesSlides/notesSlide41.xml><?xml version="1.0" encoding="utf-8"?>
+<p:notes xmlns:a="http://schemas.openxmlformats.org/drawingml/2006/main" xmlns:p="http://schemas.openxmlformats.org/presentationml/2006/main" xmlns:r="http://schemas.openxmlformats.org/officeDocument/2006/relationships">
+  <p:cSld>
+    <p:spTree>
+      <p:nvGrpSpPr>
+        <p:cNvPr id="1" name=""/>
+        <p:cNvGrpSpPr/>
+        <p:nvPr/>
+      </p:nvGrpSpPr>
+      <p:grpSpPr>
+        <a:xfrm>
+          <a:off x="0" y="0"/>
+          <a:ext cx="0" cy="0"/>
+          <a:chOff x="0" y="0"/>
+          <a:chExt cx="0" cy="0"/>
+        </a:xfrm>
+      </p:grpSpPr>
+      <p:sp>
+        <p:nvSpPr>
+          <p:cNvPr id="2" name="Slide Image Placeholder 1"/>
+          <p:cNvSpPr>
+            <a:spLocks noGrp="1"/>
+          </p:cNvSpPr>
+          <p:nvPr>
+            <p:ph type="sldImg" idx="2"/>
+          </p:nvPr>
+        </p:nvSpPr>
+        <p:spPr/>
+      </p:sp>
+      <p:sp>
+        <p:nvSpPr>
+          <p:cNvPr id="3" name="Notes Placeholder 2"/>
+          <p:cNvSpPr>
+            <a:spLocks noGrp="1"/>
+          </p:cNvSpPr>
+          <p:nvPr>
+            <p:ph type="body" idx="3" sz="quarter"/>
+          </p:nvPr>
+        </p:nvSpPr>
+        <p:spPr/>
+        <p:txBody>
+          <a:bodyPr/>
+          <a:lstStyle/>
+          <a:p>
+            <a:r>
+              <a:t>PRACTICE BOX (on-screen only — never read it, never paraphrase it, never point at it). It replaces the narrated handoff: this video ends on the recap and the Sources slide.</a:t>
+            </a:r>
+          </a:p>
+          <a:p/>
+          <a:p>
+            <a:r>
+              <a:t>VO: So before you sequence anything, design the target: the future-state picture in four layers plus the integration map, reached by applying your principles to the gaps you found, every element traceable to a sourcing decision.</a:t>
+            </a:r>
+          </a:p>
+        </p:txBody>
+      </p:sp>
+      <p:sp>
+        <p:nvSpPr>
+          <p:cNvPr id="4" name="Slide Number Placeholder 3"/>
+          <p:cNvSpPr>
+            <a:spLocks noGrp="1"/>
+          </p:cNvSpPr>
+          <p:nvPr>
+            <p:ph type="sldNum" idx="5" sz="quarter"/>
+          </p:nvPr>
+        </p:nvSpPr>
+        <p:spPr/>
+      </p:sp>
+    </p:spTree>
+  </p:cSld>
+  <p:clrMapOvr>
+    <a:masterClrMapping/>
+  </p:clrMapOvr>
+</p:notes>
+</file>
+
+<file path=ppt/notesSlides/notesSlide42.xml><?xml version="1.0" encoding="utf-8"?>
 <p:notes xmlns:a="http://schemas.openxmlformats.org/drawingml/2006/main" xmlns:p="http://schemas.openxmlformats.org/presentationml/2006/main" xmlns:r="http://schemas.openxmlformats.org/officeDocument/2006/relationships">
   <p:cSld>
     <p:spTree>
@@ -11590,2174 +11590,6 @@
 </p:sldMaster>
 </file>
 
-<file path=ppt/slides/slide1.xml><?xml version="1.0" encoding="utf-8"?>
-<p:sld xmlns:a="http://schemas.openxmlformats.org/drawingml/2006/main" xmlns:r="http://schemas.openxmlformats.org/officeDocument/2006/relationships" xmlns:p="http://schemas.openxmlformats.org/presentationml/2006/main">
-  <p:cSld>
-    <p:spTree>
-      <p:nvGrpSpPr>
-        <p:cNvPr id="1" name=""/>
-        <p:cNvGrpSpPr/>
-        <p:nvPr/>
-      </p:nvGrpSpPr>
-      <p:grpSpPr>
-        <a:xfrm>
-          <a:off x="0" y="0"/>
-          <a:ext cx="0" cy="0"/>
-          <a:chOff x="0" y="0"/>
-          <a:chExt cx="0" cy="0"/>
-        </a:xfrm>
-      </p:grpSpPr>
-      <p:cxnSp>
-        <p:nvCxnSpPr>
-          <p:cNvPr id="11" name="Straight Connector 10">
-            <a:extLst>
-              <a:ext uri="{FF2B5EF4-FFF2-40B4-BE49-F238E27FC236}">
-                <a16:creationId xmlns:a16="http://schemas.microsoft.com/office/drawing/2014/main" id="{D9AD66F2-F7C0-4D03-9150-D28F17AC561D}"/>
-              </a:ext>
-            </a:extLst>
-          </p:cNvPr>
-          <p:cNvCxnSpPr>
-            <a:cxnSpLocks/>
-          </p:cNvCxnSpPr>
-          <p:nvPr/>
-        </p:nvCxnSpPr>
-        <p:spPr>
-          <a:xfrm>
-            <a:off x="373021" y="2198718"/>
-            <a:ext cx="6843567" cy="0"/>
-          </a:xfrm>
-          <a:prstGeom prst="line">
-            <a:avLst/>
-          </a:prstGeom>
-          <a:ln w="12700">
-            <a:solidFill>
-              <a:srgbClr val="009CD6"/>
-            </a:solidFill>
-          </a:ln>
-        </p:spPr>
-        <p:style>
-          <a:lnRef idx="1">
-            <a:schemeClr val="accent1"/>
-          </a:lnRef>
-          <a:fillRef idx="0">
-            <a:schemeClr val="accent1"/>
-          </a:fillRef>
-          <a:effectRef idx="0">
-            <a:schemeClr val="accent1"/>
-          </a:effectRef>
-          <a:fontRef idx="minor">
-            <a:schemeClr val="tx1"/>
-          </a:fontRef>
-        </p:style>
-      </p:cxnSp>
-      <p:sp>
-        <p:nvSpPr>
-          <p:cNvPr id="12" name="Title 9">
-            <a:extLst>
-              <a:ext uri="{FF2B5EF4-FFF2-40B4-BE49-F238E27FC236}">
-                <a16:creationId xmlns:a16="http://schemas.microsoft.com/office/drawing/2014/main" id="{EEB08032-CE0E-4986-AEDF-A41026C0E8B9}"/>
-              </a:ext>
-            </a:extLst>
-          </p:cNvPr>
-          <p:cNvSpPr txBox="1">
-            <a:spLocks/>
-          </p:cNvSpPr>
-          <p:nvPr/>
-        </p:nvSpPr>
-        <p:spPr>
-          <a:xfrm>
-            <a:off x="237734" y="702833"/>
-            <a:ext cx="6432007" cy="1218817"/>
-          </a:xfrm>
-          <a:prstGeom prst="rect">
-            <a:avLst/>
-          </a:prstGeom>
-        </p:spPr>
-        <p:txBody>
-          <a:bodyPr anchor="b">
-            <a:noAutofit/>
-          </a:bodyPr>
-          <a:lstStyle>
-            <a:lvl1pPr algn="l" defTabSz="914400" rtl="0" eaLnBrk="1" latinLnBrk="0" hangingPunct="1">
-              <a:lnSpc>
-                <a:spcPct val="90000"/>
-              </a:lnSpc>
-              <a:spcBef>
-                <a:spcPct val="0"/>
-              </a:spcBef>
-              <a:buNone/>
-              <a:defRPr sz="4000" kern="1200">
-                <a:solidFill>
-                  <a:schemeClr val="bg1"/>
-                </a:solidFill>
-                <a:latin typeface="Arial" panose="020B0604020202020204" pitchFamily="34" charset="0"/>
-                <a:ea typeface="+mj-ea"/>
-                <a:cs typeface="Arial" panose="020B0604020202020204" pitchFamily="34" charset="0"/>
-              </a:defRPr>
-            </a:lvl1pPr>
-          </a:lstStyle>
-          <a:p>
-            <a:r>
-              <a:rPr sz="2400" b="1" i="0">
-                <a:solidFill>
-                  <a:srgbClr val="1A1A1A"/>
-                </a:solidFill>
-                <a:latin typeface="Arial"/>
-              </a:rPr>
-              <a:t>4.5 — Phase 4, Plan — design the target architecture</a:t>
-            </a:r>
-          </a:p>
-        </p:txBody>
-      </p:sp>
-      <p:pic>
-        <p:nvPicPr>
-          <p:cNvPr id="7" name="Picture 6">
-            <a:extLst>
-              <a:ext uri="{FF2B5EF4-FFF2-40B4-BE49-F238E27FC236}">
-                <a16:creationId xmlns:a16="http://schemas.microsoft.com/office/drawing/2014/main" id="{A2066351-C569-4C4C-A096-308777FCDC32}"/>
-              </a:ext>
-            </a:extLst>
-          </p:cNvPr>
-          <p:cNvPicPr>
-            <a:picLocks noChangeAspect="1"/>
-          </p:cNvPicPr>
-          <p:nvPr/>
-        </p:nvPicPr>
-        <p:blipFill>
-          <a:blip r:embed="rId2">
-            <a:extLst>
-              <a:ext uri="{28A0092B-C50C-407E-A947-70E740481C1C}">
-                <a14:useLocalDpi xmlns:a14="http://schemas.microsoft.com/office/drawing/2010/main" val="0"/>
-              </a:ext>
-            </a:extLst>
-          </a:blip>
-          <a:srcRect t="20219" b="14729"/>
-          <a:stretch>
-            <a:fillRect/>
-          </a:stretch>
-        </p:blipFill>
-        <p:spPr>
-          <a:xfrm>
-            <a:off x="0" y="5620871"/>
-            <a:ext cx="1323975" cy="1218816"/>
-          </a:xfrm>
-          <a:prstGeom prst="rect">
-            <a:avLst/>
-          </a:prstGeom>
-        </p:spPr>
-      </p:pic>
-      <p:sp>
-        <p:nvSpPr>
-          <p:cNvPr id="14" name="Title 9">
-            <a:extLst>
-              <a:ext uri="{FF2B5EF4-FFF2-40B4-BE49-F238E27FC236}">
-                <a16:creationId xmlns:a16="http://schemas.microsoft.com/office/drawing/2014/main" id="{B5087B80-3EE4-1881-0130-ED58CA625092}"/>
-              </a:ext>
-            </a:extLst>
-          </p:cNvPr>
-          <p:cNvSpPr txBox="1">
-            <a:spLocks/>
-          </p:cNvSpPr>
-          <p:nvPr/>
-        </p:nvSpPr>
-        <p:spPr>
-          <a:xfrm>
-            <a:off x="284452" y="2475786"/>
-            <a:ext cx="6382893" cy="953213"/>
-          </a:xfrm>
-          <a:prstGeom prst="rect">
-            <a:avLst/>
-          </a:prstGeom>
-        </p:spPr>
-        <p:txBody>
-          <a:bodyPr anchor="t">
-            <a:noAutofit/>
-          </a:bodyPr>
-          <a:lstStyle>
-            <a:lvl1pPr algn="l" defTabSz="914400" rtl="0" eaLnBrk="1" latinLnBrk="0" hangingPunct="1">
-              <a:lnSpc>
-                <a:spcPct val="90000"/>
-              </a:lnSpc>
-              <a:spcBef>
-                <a:spcPct val="0"/>
-              </a:spcBef>
-              <a:buNone/>
-              <a:defRPr sz="4000" kern="1200">
-                <a:solidFill>
-                  <a:schemeClr val="bg1"/>
-                </a:solidFill>
-                <a:latin typeface="Arial" panose="020B0604020202020204" pitchFamily="34" charset="0"/>
-                <a:ea typeface="+mj-ea"/>
-                <a:cs typeface="Arial" panose="020B0604020202020204" pitchFamily="34" charset="0"/>
-              </a:defRPr>
-            </a:lvl1pPr>
-          </a:lstStyle>
-          <a:p>
-            <a:pPr marL="0" marR="0" lvl="0" indent="0" rtl="0">
-              <a:spcBef>
-                <a:spcPts val="600"/>
-              </a:spcBef>
-              <a:spcAft>
-                <a:spcPts val="0"/>
-              </a:spcAft>
-              <a:buNone/>
-            </a:pPr>
-            <a:r>
-              <a:rPr sz="1300" b="1" i="0">
-                <a:solidFill>
-                  <a:srgbClr val="006E96"/>
-                </a:solidFill>
-                <a:latin typeface="Arial"/>
-              </a:rPr>
-              <a:t>KP1 · Government Enterprise Architecture · Module 4 · Video 4.5</a:t>
-            </a:r>
-          </a:p>
-          <a:p>
-            <a:r>
-              <a:rPr sz="1200" b="0" i="1">
-                <a:solidFill>
-                  <a:srgbClr val="595959"/>
-                </a:solidFill>
-                <a:latin typeface="Arial"/>
-              </a:rPr>
-              <a:t>Between the gaps and the roadmap sits the deliverable the whole EA is for — the target architecture: a future-state picture of the capabilities, the data owners, the shared platforms and the integration map your government should have. Design it by applying your principles to the gaps, and the roadmap finally has somewhere to go.</a:t>
-            </a:r>
-          </a:p>
-        </p:txBody>
-      </p:sp>
-      <p:sp>
-        <p:nvSpPr>
-          <p:cNvPr id="17" name="Title 9">
-            <a:extLst>
-              <a:ext uri="{FF2B5EF4-FFF2-40B4-BE49-F238E27FC236}">
-                <a16:creationId xmlns:a16="http://schemas.microsoft.com/office/drawing/2014/main" id="{5E8796F7-DD26-D250-5E97-B38B22298E72}"/>
-              </a:ext>
-            </a:extLst>
-          </p:cNvPr>
-          <p:cNvSpPr txBox="1">
-            <a:spLocks/>
-          </p:cNvSpPr>
-          <p:nvPr/>
-        </p:nvSpPr>
-        <p:spPr>
-          <a:xfrm>
-            <a:off x="284452" y="4363897"/>
-            <a:ext cx="6382893" cy="953213"/>
-          </a:xfrm>
-          <a:prstGeom prst="rect">
-            <a:avLst/>
-          </a:prstGeom>
-        </p:spPr>
-        <p:txBody>
-          <a:bodyPr anchor="t">
-            <a:noAutofit/>
-          </a:bodyPr>
-          <a:lstStyle>
-            <a:lvl1pPr algn="l" defTabSz="914400" rtl="0" eaLnBrk="1" latinLnBrk="0" hangingPunct="1">
-              <a:lnSpc>
-                <a:spcPct val="90000"/>
-              </a:lnSpc>
-              <a:spcBef>
-                <a:spcPct val="0"/>
-              </a:spcBef>
-              <a:buNone/>
-              <a:defRPr sz="4000" kern="1200">
-                <a:solidFill>
-                  <a:schemeClr val="bg1"/>
-                </a:solidFill>
-                <a:latin typeface="Arial" panose="020B0604020202020204" pitchFamily="34" charset="0"/>
-                <a:ea typeface="+mj-ea"/>
-                <a:cs typeface="Arial" panose="020B0604020202020204" pitchFamily="34" charset="0"/>
-              </a:defRPr>
-            </a:lvl1pPr>
-          </a:lstStyle>
-          <a:p>
-            <a:pPr marL="0" marR="0" lvl="0" indent="0" rtl="0">
-              <a:spcBef>
-                <a:spcPts val="600"/>
-              </a:spcBef>
-              <a:spcAft>
-                <a:spcPts val="1200"/>
-              </a:spcAft>
-              <a:buNone/>
-            </a:pPr>
-            <a:r>
-              <a:rPr sz="1400" b="1" i="0">
-                <a:solidFill>
-                  <a:srgbClr val="1A1A1A"/>
-                </a:solidFill>
-                <a:latin typeface="Arial"/>
-              </a:rPr>
-              <a:t>Target audience: </a:t>
-            </a:r>
-            <a:r>
-              <a:rPr sz="1400" b="0" i="0">
-                <a:solidFill>
-                  <a:srgbClr val="1A1A1A"/>
-                </a:solidFill>
-                <a:latin typeface="Arial"/>
-              </a:rPr>
-              <a:t>Chief architect · senior architect · sector ICT lead</a:t>
-            </a:r>
-          </a:p>
-        </p:txBody>
-      </p:sp>
-      <p:sp>
-        <p:nvSpPr>
-          <p:cNvPr id="18" name="Rectangle 17"/>
-          <p:cNvSpPr/>
-          <p:nvPr/>
-        </p:nvSpPr>
-        <p:spPr>
-          <a:xfrm>
-            <a:off x="7022592" y="0"/>
-            <a:ext cx="5169103" cy="6858000"/>
-          </a:xfrm>
-          <a:prstGeom prst="rect">
-            <a:avLst/>
-          </a:prstGeom>
-          <a:solidFill>
-            <a:srgbClr val="009CD6"/>
-          </a:solidFill>
-          <a:ln>
-            <a:noFill/>
-          </a:ln>
-          <a:effectLst/>
-        </p:spPr>
-        <p:style>
-          <a:lnRef idx="1">
-            <a:schemeClr val="accent1"/>
-          </a:lnRef>
-          <a:fillRef idx="3">
-            <a:schemeClr val="accent1"/>
-          </a:fillRef>
-          <a:effectRef idx="2">
-            <a:schemeClr val="accent1"/>
-          </a:effectRef>
-          <a:fontRef idx="minor">
-            <a:schemeClr val="lt1"/>
-          </a:fontRef>
-        </p:style>
-        <p:txBody>
-          <a:bodyPr rtlCol="0" anchor="ctr"/>
-          <a:lstStyle/>
-          <a:p>
-            <a:pPr algn="ctr"/>
-          </a:p>
-        </p:txBody>
-      </p:sp>
-      <p:sp>
-        <p:nvSpPr>
-          <p:cNvPr id="19" name="TextBox 18"/>
-          <p:cNvSpPr txBox="1"/>
-          <p:nvPr/>
-        </p:nvSpPr>
-        <p:spPr>
-          <a:xfrm>
-            <a:off x="7452360" y="457200"/>
-            <a:ext cx="4297680" cy="457200"/>
-          </a:xfrm>
-          <a:prstGeom prst="rect">
-            <a:avLst/>
-          </a:prstGeom>
-          <a:noFill/>
-        </p:spPr>
-        <p:txBody>
-          <a:bodyPr wrap="square">
-            <a:spAutoFit/>
-          </a:bodyPr>
-          <a:lstStyle/>
-          <a:p>
-            <a:r>
-              <a:rPr sz="1100" b="1" i="0">
-                <a:solidFill>
-                  <a:srgbClr val="E5F5FB"/>
-                </a:solidFill>
-                <a:latin typeface="Arial"/>
-              </a:rPr>
-              <a:t>THE FIVE PHASES, RUN ON ONE SECTOR</a:t>
-            </a:r>
-          </a:p>
-        </p:txBody>
-      </p:sp>
-      <p:sp>
-        <p:nvSpPr>
-          <p:cNvPr id="20" name="Rounded Rectangle 19"/>
-          <p:cNvSpPr/>
-          <p:nvPr/>
-        </p:nvSpPr>
-        <p:spPr>
-          <a:xfrm>
-            <a:off x="7452360" y="960120"/>
-            <a:ext cx="3840480" cy="658368"/>
-          </a:xfrm>
-          <a:prstGeom prst="roundRect">
-            <a:avLst>
-              <a:gd name="adj" fmla="val 14000"/>
-            </a:avLst>
-          </a:prstGeom>
-          <a:solidFill>
-            <a:srgbClr val="FFFFFF"/>
-          </a:solidFill>
-          <a:ln>
-            <a:noFill/>
-          </a:ln>
-          <a:effectLst/>
-        </p:spPr>
-        <p:style>
-          <a:lnRef idx="1">
-            <a:schemeClr val="accent1"/>
-          </a:lnRef>
-          <a:fillRef idx="3">
-            <a:schemeClr val="accent1"/>
-          </a:fillRef>
-          <a:effectRef idx="2">
-            <a:schemeClr val="accent1"/>
-          </a:effectRef>
-          <a:fontRef idx="minor">
-            <a:schemeClr val="lt1"/>
-          </a:fontRef>
-        </p:style>
-        <p:txBody>
-          <a:bodyPr rtlCol="0" anchor="ctr" lIns="164592" wrap="square"/>
-          <a:lstStyle/>
-          <a:p>
-            <a:pPr algn="ctr"/>
-            <a:r>
-              <a:rPr sz="1500" b="1" i="0">
-                <a:solidFill>
-                  <a:srgbClr val="1A1A1A"/>
-                </a:solidFill>
-                <a:latin typeface="Arial"/>
-              </a:rPr>
-              <a:t>Discover — an honest picture</a:t>
-            </a:r>
-          </a:p>
-        </p:txBody>
-      </p:sp>
-      <p:sp>
-        <p:nvSpPr>
-          <p:cNvPr id="21" name="Rounded Rectangle 20"/>
-          <p:cNvSpPr/>
-          <p:nvPr/>
-        </p:nvSpPr>
-        <p:spPr>
-          <a:xfrm>
-            <a:off x="7452360" y="1892808"/>
-            <a:ext cx="3840480" cy="658368"/>
-          </a:xfrm>
-          <a:prstGeom prst="roundRect">
-            <a:avLst>
-              <a:gd name="adj" fmla="val 14000"/>
-            </a:avLst>
-          </a:prstGeom>
-          <a:solidFill>
-            <a:srgbClr val="FFFFFF"/>
-          </a:solidFill>
-          <a:ln>
-            <a:noFill/>
-          </a:ln>
-          <a:effectLst/>
-        </p:spPr>
-        <p:style>
-          <a:lnRef idx="1">
-            <a:schemeClr val="accent1"/>
-          </a:lnRef>
-          <a:fillRef idx="3">
-            <a:schemeClr val="accent1"/>
-          </a:fillRef>
-          <a:effectRef idx="2">
-            <a:schemeClr val="accent1"/>
-          </a:effectRef>
-          <a:fontRef idx="minor">
-            <a:schemeClr val="lt1"/>
-          </a:fontRef>
-        </p:style>
-        <p:txBody>
-          <a:bodyPr rtlCol="0" anchor="ctr" lIns="164592" wrap="square"/>
-          <a:lstStyle/>
-          <a:p>
-            <a:pPr algn="ctr"/>
-            <a:r>
-              <a:rPr sz="1500" b="1" i="0">
-                <a:solidFill>
-                  <a:srgbClr val="1A1A1A"/>
-                </a:solidFill>
-                <a:latin typeface="Arial"/>
-              </a:rPr>
-              <a:t>Assess — a ranked gap analysis</a:t>
-            </a:r>
-          </a:p>
-        </p:txBody>
-      </p:sp>
-      <p:sp>
-        <p:nvSpPr>
-          <p:cNvPr id="22" name="Rounded Rectangle 21"/>
-          <p:cNvSpPr/>
-          <p:nvPr/>
-        </p:nvSpPr>
-        <p:spPr>
-          <a:xfrm>
-            <a:off x="7452360" y="2825496"/>
-            <a:ext cx="3840480" cy="658368"/>
-          </a:xfrm>
-          <a:prstGeom prst="roundRect">
-            <a:avLst>
-              <a:gd name="adj" fmla="val 14000"/>
-            </a:avLst>
-          </a:prstGeom>
-          <a:solidFill>
-            <a:srgbClr val="FFFFFF"/>
-          </a:solidFill>
-          <a:ln>
-            <a:noFill/>
-          </a:ln>
-          <a:effectLst/>
-        </p:spPr>
-        <p:style>
-          <a:lnRef idx="1">
-            <a:schemeClr val="accent1"/>
-          </a:lnRef>
-          <a:fillRef idx="3">
-            <a:schemeClr val="accent1"/>
-          </a:fillRef>
-          <a:effectRef idx="2">
-            <a:schemeClr val="accent1"/>
-          </a:effectRef>
-          <a:fontRef idx="minor">
-            <a:schemeClr val="lt1"/>
-          </a:fontRef>
-        </p:style>
-        <p:txBody>
-          <a:bodyPr rtlCol="0" anchor="ctr" lIns="164592" wrap="square"/>
-          <a:lstStyle/>
-          <a:p>
-            <a:pPr algn="ctr"/>
-            <a:r>
-              <a:rPr sz="1500" b="1" i="0">
-                <a:solidFill>
-                  <a:srgbClr val="1A1A1A"/>
-                </a:solidFill>
-                <a:latin typeface="Arial"/>
-              </a:rPr>
-              <a:t>Adapt — framework and sourcing</a:t>
-            </a:r>
-          </a:p>
-        </p:txBody>
-      </p:sp>
-      <p:sp>
-        <p:nvSpPr>
-          <p:cNvPr id="23" name="Rounded Rectangle 22"/>
-          <p:cNvSpPr/>
-          <p:nvPr/>
-        </p:nvSpPr>
-        <p:spPr>
-          <a:xfrm>
-            <a:off x="7452360" y="3758184"/>
-            <a:ext cx="3840480" cy="658368"/>
-          </a:xfrm>
-          <a:prstGeom prst="roundRect">
-            <a:avLst>
-              <a:gd name="adj" fmla="val 14000"/>
-            </a:avLst>
-          </a:prstGeom>
-          <a:solidFill>
-            <a:srgbClr val="FFFFFF"/>
-          </a:solidFill>
-          <a:ln>
-            <a:noFill/>
-          </a:ln>
-          <a:effectLst/>
-        </p:spPr>
-        <p:style>
-          <a:lnRef idx="1">
-            <a:schemeClr val="accent1"/>
-          </a:lnRef>
-          <a:fillRef idx="3">
-            <a:schemeClr val="accent1"/>
-          </a:fillRef>
-          <a:effectRef idx="2">
-            <a:schemeClr val="accent1"/>
-          </a:effectRef>
-          <a:fontRef idx="minor">
-            <a:schemeClr val="lt1"/>
-          </a:fontRef>
-        </p:style>
-        <p:txBody>
-          <a:bodyPr rtlCol="0" anchor="ctr" lIns="164592" wrap="square"/>
-          <a:lstStyle/>
-          <a:p>
-            <a:pPr algn="ctr"/>
-            <a:r>
-              <a:rPr sz="1500" b="1" i="0">
-                <a:solidFill>
-                  <a:srgbClr val="1A1A1A"/>
-                </a:solidFill>
-                <a:latin typeface="Arial"/>
-              </a:rPr>
-              <a:t>Plan — the target, then the roadmap</a:t>
-            </a:r>
-          </a:p>
-        </p:txBody>
-      </p:sp>
-      <p:sp>
-        <p:nvSpPr>
-          <p:cNvPr id="24" name="Rounded Rectangle 23"/>
-          <p:cNvSpPr/>
-          <p:nvPr/>
-        </p:nvSpPr>
-        <p:spPr>
-          <a:xfrm>
-            <a:off x="7452360" y="4690872"/>
-            <a:ext cx="3840480" cy="658368"/>
-          </a:xfrm>
-          <a:prstGeom prst="roundRect">
-            <a:avLst>
-              <a:gd name="adj" fmla="val 14000"/>
-            </a:avLst>
-          </a:prstGeom>
-          <a:solidFill>
-            <a:srgbClr val="006E96"/>
-          </a:solidFill>
-          <a:ln>
-            <a:noFill/>
-          </a:ln>
-          <a:effectLst/>
-        </p:spPr>
-        <p:style>
-          <a:lnRef idx="1">
-            <a:schemeClr val="accent1"/>
-          </a:lnRef>
-          <a:fillRef idx="3">
-            <a:schemeClr val="accent1"/>
-          </a:fillRef>
-          <a:effectRef idx="2">
-            <a:schemeClr val="accent1"/>
-          </a:effectRef>
-          <a:fontRef idx="minor">
-            <a:schemeClr val="lt1"/>
-          </a:fontRef>
-        </p:style>
-        <p:txBody>
-          <a:bodyPr rtlCol="0" anchor="ctr" lIns="164592" wrap="square"/>
-          <a:lstStyle/>
-          <a:p>
-            <a:pPr algn="ctr"/>
-            <a:r>
-              <a:rPr sz="1500" b="1" i="0">
-                <a:solidFill>
-                  <a:srgbClr val="FFFFFF"/>
-                </a:solidFill>
-                <a:latin typeface="Arial"/>
-              </a:rPr>
-              <a:t>Execute &amp; Govern — the living EA</a:t>
-            </a:r>
-          </a:p>
-        </p:txBody>
-      </p:sp>
-      <p:sp>
-        <p:nvSpPr>
-          <p:cNvPr id="25" name="TextBox 24"/>
-          <p:cNvSpPr txBox="1"/>
-          <p:nvPr/>
-        </p:nvSpPr>
-        <p:spPr>
-          <a:xfrm>
-            <a:off x="7452360" y="5806440"/>
-            <a:ext cx="4297680" cy="731520"/>
-          </a:xfrm>
-          <a:prstGeom prst="rect">
-            <a:avLst/>
-          </a:prstGeom>
-          <a:noFill/>
-        </p:spPr>
-        <p:txBody>
-          <a:bodyPr wrap="square">
-            <a:spAutoFit/>
-          </a:bodyPr>
-          <a:lstStyle/>
-          <a:p>
-            <a:r>
-              <a:rPr sz="1200" b="0" i="0">
-                <a:solidFill>
-                  <a:srgbClr val="FFFFFF"/>
-                </a:solidFill>
-                <a:latin typeface="Arial"/>
-              </a:rPr>
-              <a:t>5 phases · 4 sign-offs · 6 deliverables · 1 worked sector</a:t>
-            </a:r>
-          </a:p>
-        </p:txBody>
-      </p:sp>
-    </p:spTree>
-    <p:extLst>
-      <p:ext uri="{BB962C8B-B14F-4D97-AF65-F5344CB8AC3E}">
-        <p14:creationId xmlns:p14="http://schemas.microsoft.com/office/powerpoint/2010/main" val="1196800265"/>
-      </p:ext>
-    </p:extLst>
-  </p:cSld>
-  <p:clrMapOvr>
-    <a:masterClrMapping/>
-  </p:clrMapOvr>
-</p:sld>
-</file>
-
-<file path=ppt/slides/slide31.xml><?xml version="1.0" encoding="utf-8"?>
-<p:sld xmlns:a="http://schemas.openxmlformats.org/drawingml/2006/main" xmlns:p="http://schemas.openxmlformats.org/presentationml/2006/main" xmlns:r="http://schemas.openxmlformats.org/officeDocument/2006/relationships">
-  <p:cSld>
-    <p:spTree>
-      <p:nvGrpSpPr>
-        <p:cNvPr id="1" name=""/>
-        <p:cNvGrpSpPr/>
-        <p:nvPr/>
-      </p:nvGrpSpPr>
-      <p:grpSpPr/>
-      <p:sp>
-        <p:nvSpPr>
-          <p:cNvPr id="2" name="TextBox 1"/>
-          <p:cNvSpPr txBox="1"/>
-          <p:nvPr/>
-        </p:nvSpPr>
-        <p:spPr>
-          <a:xfrm>
-            <a:off x="822960" y="822960"/>
-            <a:ext cx="7315200" cy="457200"/>
-          </a:xfrm>
-          <a:prstGeom prst="rect">
-            <a:avLst/>
-          </a:prstGeom>
-          <a:noFill/>
-        </p:spPr>
-        <p:txBody>
-          <a:bodyPr wrap="square">
-            <a:spAutoFit/>
-          </a:bodyPr>
-          <a:lstStyle/>
-          <a:p>
-            <a:r>
-              <a:rPr sz="1200" b="1" i="0">
-                <a:solidFill>
-                  <a:srgbClr val="595959"/>
-                </a:solidFill>
-                <a:latin typeface="Arial"/>
-              </a:rPr>
-              <a:t>KP1 · MODULE 4 · VIDEO 4.5</a:t>
-            </a:r>
-          </a:p>
-        </p:txBody>
-      </p:sp>
-      <p:sp>
-        <p:nvSpPr>
-          <p:cNvPr id="3" name="TextBox 2"/>
-          <p:cNvSpPr txBox="1"/>
-          <p:nvPr/>
-        </p:nvSpPr>
-        <p:spPr>
-          <a:xfrm>
-            <a:off x="822960" y="1828800"/>
-            <a:ext cx="2011680" cy="1097280"/>
-          </a:xfrm>
-          <a:prstGeom prst="rect">
-            <a:avLst/>
-          </a:prstGeom>
-          <a:noFill/>
-        </p:spPr>
-        <p:txBody>
-          <a:bodyPr wrap="square">
-            <a:spAutoFit/>
-          </a:bodyPr>
-          <a:lstStyle/>
-          <a:p>
-            <a:r>
-              <a:rPr sz="6000" b="1" i="0">
-                <a:solidFill>
-                  <a:srgbClr val="009CD6"/>
-                </a:solidFill>
-                <a:latin typeface="Arial"/>
-              </a:rPr>
-              <a:t>4.5</a:t>
-            </a:r>
-          </a:p>
-        </p:txBody>
-      </p:sp>
-      <p:sp>
-        <p:nvSpPr>
-          <p:cNvPr id="4" name="TextBox 3"/>
-          <p:cNvSpPr txBox="1"/>
-          <p:nvPr/>
-        </p:nvSpPr>
-        <p:spPr>
-          <a:xfrm>
-            <a:off x="822960" y="2880360"/>
-            <a:ext cx="9601200" cy="1371600"/>
-          </a:xfrm>
-          <a:prstGeom prst="rect">
-            <a:avLst/>
-          </a:prstGeom>
-          <a:noFill/>
-        </p:spPr>
-        <p:txBody>
-          <a:bodyPr wrap="square">
-            <a:spAutoFit/>
-          </a:bodyPr>
-          <a:lstStyle/>
-          <a:p>
-            <a:r>
-              <a:rPr sz="3400" b="1" i="0">
-                <a:solidFill>
-                  <a:srgbClr val="1A1A1A"/>
-                </a:solidFill>
-                <a:latin typeface="Arial"/>
-              </a:rPr>
-              <a:t>Phase 4, Plan — design the target architecture</a:t>
-            </a:r>
-          </a:p>
-        </p:txBody>
-      </p:sp>
-      <p:sp>
-        <p:nvSpPr>
-          <p:cNvPr id="5" name="TextBox 4"/>
-          <p:cNvSpPr txBox="1"/>
-          <p:nvPr/>
-        </p:nvSpPr>
-        <p:spPr>
-          <a:xfrm>
-            <a:off x="822960" y="4343400"/>
-            <a:ext cx="9875520" cy="1554480"/>
-          </a:xfrm>
-          <a:prstGeom prst="rect">
-            <a:avLst/>
-          </a:prstGeom>
-          <a:noFill/>
-        </p:spPr>
-        <p:txBody>
-          <a:bodyPr wrap="square">
-            <a:spAutoFit/>
-          </a:bodyPr>
-          <a:lstStyle/>
-          <a:p>
-            <a:r>
-              <a:rPr sz="1700" b="0" i="1">
-                <a:solidFill>
-                  <a:srgbClr val="595959"/>
-                </a:solidFill>
-                <a:latin typeface="Arial"/>
-              </a:rPr>
-              <a:t>Between the gaps and the roadmap sits the deliverable the whole EA is for — the target architecture: a future-state picture of the capabilities, the data owners, the shared platforms and the integration map your government should have. Design it by applying your principles to the gaps, and the roadmap finally has somewhere to go.</a:t>
-            </a:r>
-          </a:p>
-        </p:txBody>
-      </p:sp>
-      <p:sp>
-        <p:nvSpPr>
-          <p:cNvPr id="6" name="TextBox 5"/>
-          <p:cNvSpPr txBox="1"/>
-          <p:nvPr/>
-        </p:nvSpPr>
-        <p:spPr>
-          <a:xfrm>
-            <a:off x="822960" y="5989320"/>
-            <a:ext cx="7315200" cy="365760"/>
-          </a:xfrm>
-          <a:prstGeom prst="rect">
-            <a:avLst/>
-          </a:prstGeom>
-          <a:noFill/>
-        </p:spPr>
-        <p:txBody>
-          <a:bodyPr wrap="square">
-            <a:spAutoFit/>
-          </a:bodyPr>
-          <a:lstStyle/>
-          <a:p>
-            <a:r>
-              <a:rPr sz="1200" b="0" i="0">
-                <a:solidFill>
-                  <a:srgbClr val="595959"/>
-                </a:solidFill>
-                <a:latin typeface="Arial"/>
-              </a:rPr>
-              <a:t>~4 minutes · standalone video · voice-over on text slides</a:t>
-            </a:r>
-          </a:p>
-        </p:txBody>
-      </p:sp>
-    </p:spTree>
-  </p:cSld>
-  <p:clrMapOvr>
-    <a:masterClrMapping/>
-  </p:clrMapOvr>
-</p:sld>
-</file>
-
-<file path=ppt/slides/slide32.xml><?xml version="1.0" encoding="utf-8"?>
-<p:sld xmlns:a="http://schemas.openxmlformats.org/drawingml/2006/main" xmlns:p="http://schemas.openxmlformats.org/presentationml/2006/main" xmlns:r="http://schemas.openxmlformats.org/officeDocument/2006/relationships">
-  <p:cSld>
-    <p:spTree>
-      <p:nvGrpSpPr>
-        <p:cNvPr id="1" name=""/>
-        <p:cNvGrpSpPr/>
-        <p:nvPr/>
-      </p:nvGrpSpPr>
-      <p:grpSpPr/>
-      <p:sp>
-        <p:nvSpPr>
-          <p:cNvPr id="2" name="Rectangle 1"/>
-          <p:cNvSpPr/>
-          <p:nvPr/>
-        </p:nvSpPr>
-        <p:spPr>
-          <a:xfrm>
-            <a:off x="457200" y="384048"/>
-            <a:ext cx="45720" cy="256032"/>
-          </a:xfrm>
-          <a:prstGeom prst="rect">
-            <a:avLst/>
-          </a:prstGeom>
-          <a:solidFill>
-            <a:srgbClr val="009CD6"/>
-          </a:solidFill>
-          <a:ln>
-            <a:noFill/>
-          </a:ln>
-          <a:effectLst/>
-        </p:spPr>
-        <p:style>
-          <a:lnRef idx="1">
-            <a:schemeClr val="accent1"/>
-          </a:lnRef>
-          <a:fillRef idx="3">
-            <a:schemeClr val="accent1"/>
-          </a:fillRef>
-          <a:effectRef idx="2">
-            <a:schemeClr val="accent1"/>
-          </a:effectRef>
-          <a:fontRef idx="minor">
-            <a:schemeClr val="lt1"/>
-          </a:fontRef>
-        </p:style>
-        <p:txBody>
-          <a:bodyPr rtlCol="0" anchor="ctr"/>
-          <a:lstStyle/>
-          <a:p>
-            <a:pPr algn="ctr"/>
-          </a:p>
-        </p:txBody>
-      </p:sp>
-      <p:sp>
-        <p:nvSpPr>
-          <p:cNvPr id="3" name="TextBox 2"/>
-          <p:cNvSpPr txBox="1"/>
-          <p:nvPr/>
-        </p:nvSpPr>
-        <p:spPr>
-          <a:xfrm>
-            <a:off x="621792" y="274320"/>
-            <a:ext cx="11247120" cy="914400"/>
-          </a:xfrm>
-          <a:prstGeom prst="rect">
-            <a:avLst/>
-          </a:prstGeom>
-          <a:noFill/>
-        </p:spPr>
-        <p:txBody>
-          <a:bodyPr wrap="square">
-            <a:spAutoFit/>
-          </a:bodyPr>
-          <a:lstStyle/>
-          <a:p>
-            <a:r>
-              <a:rPr sz="2800" b="1" i="0">
-                <a:solidFill>
-                  <a:srgbClr val="1A1A1A"/>
-                </a:solidFill>
-                <a:latin typeface="Arial"/>
-              </a:rPr>
-              <a:t>The target is the current-state picture, designed instead of observed</a:t>
-            </a:r>
-          </a:p>
-        </p:txBody>
-      </p:sp>
-      <p:sp>
-        <p:nvSpPr>
-          <p:cNvPr id="4" name="Oval 3"/>
-          <p:cNvSpPr/>
-          <p:nvPr/>
-        </p:nvSpPr>
-        <p:spPr>
-          <a:xfrm>
-            <a:off x="621792" y="1508760"/>
-            <a:ext cx="310896" cy="310896"/>
-          </a:xfrm>
-          <a:prstGeom prst="ellipse">
-            <a:avLst/>
-          </a:prstGeom>
-          <a:solidFill>
-            <a:srgbClr val="009CD6"/>
-          </a:solidFill>
-          <a:ln>
-            <a:noFill/>
-          </a:ln>
-          <a:effectLst/>
-        </p:spPr>
-        <p:style>
-          <a:lnRef idx="1">
-            <a:schemeClr val="accent1"/>
-          </a:lnRef>
-          <a:fillRef idx="3">
-            <a:schemeClr val="accent1"/>
-          </a:fillRef>
-          <a:effectRef idx="2">
-            <a:schemeClr val="accent1"/>
-          </a:effectRef>
-          <a:fontRef idx="minor">
-            <a:schemeClr val="lt1"/>
-          </a:fontRef>
-        </p:style>
-        <p:txBody>
-          <a:bodyPr rtlCol="0" anchor="ctr" lIns="0" rIns="0" tIns="0" bIns="0" wrap="square"/>
-          <a:lstStyle/>
-          <a:p>
-            <a:pPr algn="ctr"/>
-            <a:r>
-              <a:rPr sz="1300" b="1" i="0">
-                <a:solidFill>
-                  <a:srgbClr val="FFFFFF"/>
-                </a:solidFill>
-                <a:latin typeface="Arial"/>
-              </a:rPr>
-              <a:t>1</a:t>
-            </a:r>
-          </a:p>
-        </p:txBody>
-      </p:sp>
-      <p:sp>
-        <p:nvSpPr>
-          <p:cNvPr id="5" name="TextBox 4"/>
-          <p:cNvSpPr txBox="1"/>
-          <p:nvPr/>
-        </p:nvSpPr>
-        <p:spPr>
-          <a:xfrm>
-            <a:off x="1115568" y="1463040"/>
-            <a:ext cx="10527487" cy="1028699"/>
-          </a:xfrm>
-          <a:prstGeom prst="rect">
-            <a:avLst/>
-          </a:prstGeom>
-          <a:noFill/>
-        </p:spPr>
-        <p:txBody>
-          <a:bodyPr wrap="square">
-            <a:spAutoFit/>
-          </a:bodyPr>
-          <a:lstStyle/>
-          <a:p>
-            <a:pPr>
-              <a:spcAft>
-                <a:spcPts val="300"/>
-              </a:spcAft>
-            </a:pPr>
-            <a:r>
-              <a:rPr sz="1900" b="1" i="0">
-                <a:solidFill>
-                  <a:srgbClr val="1A1A1A"/>
-                </a:solidFill>
-                <a:latin typeface="Arial"/>
-              </a:rPr>
-              <a:t>Target capabilities</a:t>
-            </a:r>
-          </a:p>
-          <a:p>
-            <a:pPr>
-              <a:spcAft>
-                <a:spcPts val="300"/>
-              </a:spcAft>
-            </a:pPr>
-            <a:r>
-              <a:rPr sz="1550" b="0" i="0">
-                <a:solidFill>
-                  <a:srgbClr val="595959"/>
-                </a:solidFill>
-                <a:latin typeface="Arial"/>
-              </a:rPr>
-              <a:t>Each owned by exactly one body. The duplicates resolved.</a:t>
-            </a:r>
-          </a:p>
-        </p:txBody>
-      </p:sp>
-      <p:sp>
-        <p:nvSpPr>
-          <p:cNvPr id="6" name="Rectangle 5"/>
-          <p:cNvSpPr/>
-          <p:nvPr/>
-        </p:nvSpPr>
-        <p:spPr>
-          <a:xfrm>
-            <a:off x="621792" y="2496312"/>
-            <a:ext cx="10881360" cy="12700"/>
-          </a:xfrm>
-          <a:prstGeom prst="rect">
-            <a:avLst/>
-          </a:prstGeom>
-          <a:solidFill>
-            <a:srgbClr val="DDECF4"/>
-          </a:solidFill>
-          <a:ln>
-            <a:noFill/>
-          </a:ln>
-          <a:effectLst/>
-        </p:spPr>
-        <p:style>
-          <a:lnRef idx="1">
-            <a:schemeClr val="accent1"/>
-          </a:lnRef>
-          <a:fillRef idx="3">
-            <a:schemeClr val="accent1"/>
-          </a:fillRef>
-          <a:effectRef idx="2">
-            <a:schemeClr val="accent1"/>
-          </a:effectRef>
-          <a:fontRef idx="minor">
-            <a:schemeClr val="lt1"/>
-          </a:fontRef>
-        </p:style>
-        <p:txBody>
-          <a:bodyPr rtlCol="0" anchor="ctr"/>
-          <a:lstStyle/>
-          <a:p>
-            <a:pPr algn="ctr"/>
-          </a:p>
-        </p:txBody>
-      </p:sp>
-      <p:sp>
-        <p:nvSpPr>
-          <p:cNvPr id="7" name="Oval 6"/>
-          <p:cNvSpPr/>
-          <p:nvPr/>
-        </p:nvSpPr>
-        <p:spPr>
-          <a:xfrm>
-            <a:off x="621792" y="2583179"/>
-            <a:ext cx="310896" cy="310896"/>
-          </a:xfrm>
-          <a:prstGeom prst="ellipse">
-            <a:avLst/>
-          </a:prstGeom>
-          <a:solidFill>
-            <a:srgbClr val="009CD6"/>
-          </a:solidFill>
-          <a:ln>
-            <a:noFill/>
-          </a:ln>
-          <a:effectLst/>
-        </p:spPr>
-        <p:style>
-          <a:lnRef idx="1">
-            <a:schemeClr val="accent1"/>
-          </a:lnRef>
-          <a:fillRef idx="3">
-            <a:schemeClr val="accent1"/>
-          </a:fillRef>
-          <a:effectRef idx="2">
-            <a:schemeClr val="accent1"/>
-          </a:effectRef>
-          <a:fontRef idx="minor">
-            <a:schemeClr val="lt1"/>
-          </a:fontRef>
-        </p:style>
-        <p:txBody>
-          <a:bodyPr rtlCol="0" anchor="ctr" lIns="0" rIns="0" tIns="0" bIns="0" wrap="square"/>
-          <a:lstStyle/>
-          <a:p>
-            <a:pPr algn="ctr"/>
-            <a:r>
-              <a:rPr sz="1300" b="1" i="0">
-                <a:solidFill>
-                  <a:srgbClr val="FFFFFF"/>
-                </a:solidFill>
-                <a:latin typeface="Arial"/>
-              </a:rPr>
-              <a:t>2</a:t>
-            </a:r>
-          </a:p>
-        </p:txBody>
-      </p:sp>
-      <p:sp>
-        <p:nvSpPr>
-          <p:cNvPr id="8" name="TextBox 7"/>
-          <p:cNvSpPr txBox="1"/>
-          <p:nvPr/>
-        </p:nvSpPr>
-        <p:spPr>
-          <a:xfrm>
-            <a:off x="1115568" y="2537460"/>
-            <a:ext cx="10527487" cy="1028699"/>
-          </a:xfrm>
-          <a:prstGeom prst="rect">
-            <a:avLst/>
-          </a:prstGeom>
-          <a:noFill/>
-        </p:spPr>
-        <p:txBody>
-          <a:bodyPr wrap="square">
-            <a:spAutoFit/>
-          </a:bodyPr>
-          <a:lstStyle/>
-          <a:p>
-            <a:pPr>
-              <a:spcAft>
-                <a:spcPts val="300"/>
-              </a:spcAft>
-            </a:pPr>
-            <a:r>
-              <a:rPr sz="1900" b="1" i="0">
-                <a:solidFill>
-                  <a:srgbClr val="1A1A1A"/>
-                </a:solidFill>
-                <a:latin typeface="Arial"/>
-              </a:rPr>
-              <a:t>Target data domains</a:t>
-            </a:r>
-          </a:p>
-          <a:p>
-            <a:pPr>
-              <a:spcAft>
-                <a:spcPts val="300"/>
-              </a:spcAft>
-            </a:pPr>
-            <a:r>
-              <a:rPr sz="1550" b="0" i="0">
-                <a:solidFill>
-                  <a:srgbClr val="595959"/>
-                </a:solidFill>
-                <a:latin typeface="Arial"/>
-              </a:rPr>
-              <a:t>One authoritative owner for the learner, the person, the result.</a:t>
-            </a:r>
-          </a:p>
-        </p:txBody>
-      </p:sp>
-      <p:sp>
-        <p:nvSpPr>
-          <p:cNvPr id="9" name="Rectangle 8"/>
-          <p:cNvSpPr/>
-          <p:nvPr/>
-        </p:nvSpPr>
-        <p:spPr>
-          <a:xfrm>
-            <a:off x="621792" y="3570732"/>
-            <a:ext cx="10881360" cy="12700"/>
-          </a:xfrm>
-          <a:prstGeom prst="rect">
-            <a:avLst/>
-          </a:prstGeom>
-          <a:solidFill>
-            <a:srgbClr val="DDECF4"/>
-          </a:solidFill>
-          <a:ln>
-            <a:noFill/>
-          </a:ln>
-          <a:effectLst/>
-        </p:spPr>
-        <p:style>
-          <a:lnRef idx="1">
-            <a:schemeClr val="accent1"/>
-          </a:lnRef>
-          <a:fillRef idx="3">
-            <a:schemeClr val="accent1"/>
-          </a:fillRef>
-          <a:effectRef idx="2">
-            <a:schemeClr val="accent1"/>
-          </a:effectRef>
-          <a:fontRef idx="minor">
-            <a:schemeClr val="lt1"/>
-          </a:fontRef>
-        </p:style>
-        <p:txBody>
-          <a:bodyPr rtlCol="0" anchor="ctr"/>
-          <a:lstStyle/>
-          <a:p>
-            <a:pPr algn="ctr"/>
-          </a:p>
-        </p:txBody>
-      </p:sp>
-      <p:sp>
-        <p:nvSpPr>
-          <p:cNvPr id="10" name="Oval 9"/>
-          <p:cNvSpPr/>
-          <p:nvPr/>
-        </p:nvSpPr>
-        <p:spPr>
-          <a:xfrm>
-            <a:off x="621792" y="3657599"/>
-            <a:ext cx="310896" cy="310896"/>
-          </a:xfrm>
-          <a:prstGeom prst="ellipse">
-            <a:avLst/>
-          </a:prstGeom>
-          <a:solidFill>
-            <a:srgbClr val="009CD6"/>
-          </a:solidFill>
-          <a:ln>
-            <a:noFill/>
-          </a:ln>
-          <a:effectLst/>
-        </p:spPr>
-        <p:style>
-          <a:lnRef idx="1">
-            <a:schemeClr val="accent1"/>
-          </a:lnRef>
-          <a:fillRef idx="3">
-            <a:schemeClr val="accent1"/>
-          </a:fillRef>
-          <a:effectRef idx="2">
-            <a:schemeClr val="accent1"/>
-          </a:effectRef>
-          <a:fontRef idx="minor">
-            <a:schemeClr val="lt1"/>
-          </a:fontRef>
-        </p:style>
-        <p:txBody>
-          <a:bodyPr rtlCol="0" anchor="ctr" lIns="0" rIns="0" tIns="0" bIns="0" wrap="square"/>
-          <a:lstStyle/>
-          <a:p>
-            <a:pPr algn="ctr"/>
-            <a:r>
-              <a:rPr sz="1300" b="1" i="0">
-                <a:solidFill>
-                  <a:srgbClr val="FFFFFF"/>
-                </a:solidFill>
-                <a:latin typeface="Arial"/>
-              </a:rPr>
-              <a:t>3</a:t>
-            </a:r>
-          </a:p>
-        </p:txBody>
-      </p:sp>
-      <p:sp>
-        <p:nvSpPr>
-          <p:cNvPr id="11" name="TextBox 10"/>
-          <p:cNvSpPr txBox="1"/>
-          <p:nvPr/>
-        </p:nvSpPr>
-        <p:spPr>
-          <a:xfrm>
-            <a:off x="1115568" y="3611879"/>
-            <a:ext cx="10527487" cy="1028699"/>
-          </a:xfrm>
-          <a:prstGeom prst="rect">
-            <a:avLst/>
-          </a:prstGeom>
-          <a:noFill/>
-        </p:spPr>
-        <p:txBody>
-          <a:bodyPr wrap="square">
-            <a:spAutoFit/>
-          </a:bodyPr>
-          <a:lstStyle/>
-          <a:p>
-            <a:pPr>
-              <a:spcAft>
-                <a:spcPts val="300"/>
-              </a:spcAft>
-            </a:pPr>
-            <a:r>
-              <a:rPr sz="1900" b="1" i="0">
-                <a:solidFill>
-                  <a:srgbClr val="1A1A1A"/>
-                </a:solidFill>
-                <a:latin typeface="Arial"/>
-              </a:rPr>
-              <a:t>Target shared platforms</a:t>
-            </a:r>
-          </a:p>
-          <a:p>
-            <a:pPr>
-              <a:spcAft>
-                <a:spcPts val="300"/>
-              </a:spcAft>
-            </a:pPr>
-            <a:r>
-              <a:rPr sz="1550" b="0" i="0">
-                <a:solidFill>
-                  <a:srgbClr val="595959"/>
-                </a:solidFill>
-                <a:latin typeface="Arial"/>
-              </a:rPr>
-              <a:t>The identity platform and the data-exchange backbone, consumed by all.</a:t>
-            </a:r>
-          </a:p>
-        </p:txBody>
-      </p:sp>
-      <p:sp>
-        <p:nvSpPr>
-          <p:cNvPr id="12" name="Rectangle 11"/>
-          <p:cNvSpPr/>
-          <p:nvPr/>
-        </p:nvSpPr>
-        <p:spPr>
-          <a:xfrm>
-            <a:off x="621792" y="4645152"/>
-            <a:ext cx="10881360" cy="12700"/>
-          </a:xfrm>
-          <a:prstGeom prst="rect">
-            <a:avLst/>
-          </a:prstGeom>
-          <a:solidFill>
-            <a:srgbClr val="DDECF4"/>
-          </a:solidFill>
-          <a:ln>
-            <a:noFill/>
-          </a:ln>
-          <a:effectLst/>
-        </p:spPr>
-        <p:style>
-          <a:lnRef idx="1">
-            <a:schemeClr val="accent1"/>
-          </a:lnRef>
-          <a:fillRef idx="3">
-            <a:schemeClr val="accent1"/>
-          </a:fillRef>
-          <a:effectRef idx="2">
-            <a:schemeClr val="accent1"/>
-          </a:effectRef>
-          <a:fontRef idx="minor">
-            <a:schemeClr val="lt1"/>
-          </a:fontRef>
-        </p:style>
-        <p:txBody>
-          <a:bodyPr rtlCol="0" anchor="ctr"/>
-          <a:lstStyle/>
-          <a:p>
-            <a:pPr algn="ctr"/>
-          </a:p>
-        </p:txBody>
-      </p:sp>
-      <p:sp>
-        <p:nvSpPr>
-          <p:cNvPr id="13" name="Oval 12"/>
-          <p:cNvSpPr/>
-          <p:nvPr/>
-        </p:nvSpPr>
-        <p:spPr>
-          <a:xfrm>
-            <a:off x="621792" y="4732020"/>
-            <a:ext cx="310896" cy="310896"/>
-          </a:xfrm>
-          <a:prstGeom prst="ellipse">
-            <a:avLst/>
-          </a:prstGeom>
-          <a:solidFill>
-            <a:srgbClr val="009CD6"/>
-          </a:solidFill>
-          <a:ln>
-            <a:noFill/>
-          </a:ln>
-          <a:effectLst/>
-        </p:spPr>
-        <p:style>
-          <a:lnRef idx="1">
-            <a:schemeClr val="accent1"/>
-          </a:lnRef>
-          <a:fillRef idx="3">
-            <a:schemeClr val="accent1"/>
-          </a:fillRef>
-          <a:effectRef idx="2">
-            <a:schemeClr val="accent1"/>
-          </a:effectRef>
-          <a:fontRef idx="minor">
-            <a:schemeClr val="lt1"/>
-          </a:fontRef>
-        </p:style>
-        <p:txBody>
-          <a:bodyPr rtlCol="0" anchor="ctr" lIns="0" rIns="0" tIns="0" bIns="0" wrap="square"/>
-          <a:lstStyle/>
-          <a:p>
-            <a:pPr algn="ctr"/>
-            <a:r>
-              <a:rPr sz="1300" b="1" i="0">
-                <a:solidFill>
-                  <a:srgbClr val="FFFFFF"/>
-                </a:solidFill>
-                <a:latin typeface="Arial"/>
-              </a:rPr>
-              <a:t>4</a:t>
-            </a:r>
-          </a:p>
-        </p:txBody>
-      </p:sp>
-      <p:sp>
-        <p:nvSpPr>
-          <p:cNvPr id="14" name="TextBox 13"/>
-          <p:cNvSpPr txBox="1"/>
-          <p:nvPr/>
-        </p:nvSpPr>
-        <p:spPr>
-          <a:xfrm>
-            <a:off x="1115568" y="4686300"/>
-            <a:ext cx="10527487" cy="1028699"/>
-          </a:xfrm>
-          <a:prstGeom prst="rect">
-            <a:avLst/>
-          </a:prstGeom>
-          <a:noFill/>
-        </p:spPr>
-        <p:txBody>
-          <a:bodyPr wrap="square">
-            <a:spAutoFit/>
-          </a:bodyPr>
-          <a:lstStyle/>
-          <a:p>
-            <a:pPr>
-              <a:spcAft>
-                <a:spcPts val="300"/>
-              </a:spcAft>
-            </a:pPr>
-            <a:r>
-              <a:rPr sz="1900" b="1" i="0">
-                <a:solidFill>
-                  <a:srgbClr val="1A1A1A"/>
-                </a:solidFill>
-                <a:latin typeface="Arial"/>
-              </a:rPr>
-              <a:t>Target technology standards</a:t>
-            </a:r>
-          </a:p>
-          <a:p>
-            <a:pPr>
-              <a:spcAft>
-                <a:spcPts val="300"/>
-              </a:spcAft>
-            </a:pPr>
-            <a:r>
-              <a:rPr sz="1550" b="0" i="0">
-                <a:solidFill>
-                  <a:srgbClr val="595959"/>
-                </a:solidFill>
-                <a:latin typeface="Arial"/>
-              </a:rPr>
-              <a:t>What everything that follows is built to.</a:t>
-            </a:r>
-          </a:p>
-        </p:txBody>
-      </p:sp>
-      <p:sp>
-        <p:nvSpPr>
-          <p:cNvPr id="15" name="TextBox 14"/>
-          <p:cNvSpPr txBox="1"/>
-          <p:nvPr/>
-        </p:nvSpPr>
-        <p:spPr>
-          <a:xfrm>
-            <a:off x="658368" y="5870448"/>
-            <a:ext cx="10881360" cy="548640"/>
-          </a:xfrm>
-          <a:prstGeom prst="rect">
-            <a:avLst/>
-          </a:prstGeom>
-          <a:noFill/>
-        </p:spPr>
-        <p:txBody>
-          <a:bodyPr wrap="square">
-            <a:spAutoFit/>
-          </a:bodyPr>
-          <a:lstStyle/>
-          <a:p>
-            <a:r>
-              <a:rPr sz="1550" b="1" i="0">
-                <a:solidFill>
-                  <a:srgbClr val="006E96"/>
-                </a:solidFill>
-                <a:latin typeface="Arial"/>
-              </a:rPr>
-              <a:t>The same four layers as the AS-IS — drawn forward, not recorded.</a:t>
-            </a:r>
-          </a:p>
-        </p:txBody>
-      </p:sp>
-      <p:sp>
-        <p:nvSpPr>
-          <p:cNvPr id="16" name="TextBox 15"/>
-          <p:cNvSpPr txBox="1"/>
-          <p:nvPr/>
-        </p:nvSpPr>
-        <p:spPr>
-          <a:xfrm>
-            <a:off x="457200" y="6473952"/>
-            <a:ext cx="7772400" cy="292608"/>
-          </a:xfrm>
-          <a:prstGeom prst="rect">
-            <a:avLst/>
-          </a:prstGeom>
-          <a:noFill/>
-        </p:spPr>
-        <p:txBody>
-          <a:bodyPr wrap="square">
-            <a:spAutoFit/>
-          </a:bodyPr>
-          <a:lstStyle/>
-          <a:p>
-            <a:r>
-              <a:rPr sz="900" b="0" i="0">
-                <a:solidFill>
-                  <a:srgbClr val="595959"/>
-                </a:solidFill>
-                <a:latin typeface="Arial"/>
-              </a:rPr>
-              <a:t>4.5 · Phase 4, Plan — design the target architecture</a:t>
-            </a:r>
-          </a:p>
-        </p:txBody>
-      </p:sp>
-    </p:spTree>
-  </p:cSld>
-  <p:clrMapOvr>
-    <a:masterClrMapping/>
-  </p:clrMapOvr>
-</p:sld>
-</file>
-
-<file path=ppt/slides/slide33.xml><?xml version="1.0" encoding="utf-8"?>
-<p:sld xmlns:a="http://schemas.openxmlformats.org/drawingml/2006/main" xmlns:p="http://schemas.openxmlformats.org/presentationml/2006/main" xmlns:r="http://schemas.openxmlformats.org/officeDocument/2006/relationships">
-  <p:cSld>
-    <p:spTree>
-      <p:nvGrpSpPr>
-        <p:cNvPr id="1" name=""/>
-        <p:cNvGrpSpPr/>
-        <p:nvPr/>
-      </p:nvGrpSpPr>
-      <p:grpSpPr/>
-      <p:sp>
-        <p:nvSpPr>
-          <p:cNvPr id="2" name="Rectangle 1"/>
-          <p:cNvSpPr/>
-          <p:nvPr/>
-        </p:nvSpPr>
-        <p:spPr>
-          <a:xfrm>
-            <a:off x="457200" y="384048"/>
-            <a:ext cx="45720" cy="256032"/>
-          </a:xfrm>
-          <a:prstGeom prst="rect">
-            <a:avLst/>
-          </a:prstGeom>
-          <a:solidFill>
-            <a:srgbClr val="009CD6"/>
-          </a:solidFill>
-          <a:ln>
-            <a:noFill/>
-          </a:ln>
-          <a:effectLst/>
-        </p:spPr>
-        <p:style>
-          <a:lnRef idx="1">
-            <a:schemeClr val="accent1"/>
-          </a:lnRef>
-          <a:fillRef idx="3">
-            <a:schemeClr val="accent1"/>
-          </a:fillRef>
-          <a:effectRef idx="2">
-            <a:schemeClr val="accent1"/>
-          </a:effectRef>
-          <a:fontRef idx="minor">
-            <a:schemeClr val="lt1"/>
-          </a:fontRef>
-        </p:style>
-        <p:txBody>
-          <a:bodyPr rtlCol="0" anchor="ctr"/>
-          <a:lstStyle/>
-          <a:p>
-            <a:pPr algn="ctr"/>
-          </a:p>
-        </p:txBody>
-      </p:sp>
-      <p:sp>
-        <p:nvSpPr>
-          <p:cNvPr id="3" name="TextBox 2"/>
-          <p:cNvSpPr txBox="1"/>
-          <p:nvPr/>
-        </p:nvSpPr>
-        <p:spPr>
-          <a:xfrm>
-            <a:off x="621792" y="274320"/>
-            <a:ext cx="11247120" cy="914400"/>
-          </a:xfrm>
-          <a:prstGeom prst="rect">
-            <a:avLst/>
-          </a:prstGeom>
-          <a:noFill/>
-        </p:spPr>
-        <p:txBody>
-          <a:bodyPr wrap="square">
-            <a:spAutoFit/>
-          </a:bodyPr>
-          <a:lstStyle/>
-          <a:p>
-            <a:r>
-              <a:rPr sz="2800" b="1" i="0">
-                <a:solidFill>
-                  <a:srgbClr val="1A1A1A"/>
-                </a:solidFill>
-                <a:latin typeface="Arial"/>
-              </a:rPr>
-              <a:t>You do not invent the target — you apply your principles to your gaps</a:t>
-            </a:r>
-          </a:p>
-        </p:txBody>
-      </p:sp>
-      <p:sp>
-        <p:nvSpPr>
-          <p:cNvPr id="4" name="TextBox 3"/>
-          <p:cNvSpPr txBox="1"/>
-          <p:nvPr/>
-        </p:nvSpPr>
-        <p:spPr>
-          <a:xfrm>
-            <a:off x="658368" y="1600200"/>
-            <a:ext cx="10881360" cy="2651760"/>
-          </a:xfrm>
-          <a:prstGeom prst="rect">
-            <a:avLst/>
-          </a:prstGeom>
-          <a:noFill/>
-        </p:spPr>
-        <p:txBody>
-          <a:bodyPr wrap="square">
-            <a:spAutoFit/>
-          </a:bodyPr>
-          <a:lstStyle/>
-          <a:p>
-            <a:pPr>
-              <a:spcAft>
-                <a:spcPts val="1200"/>
-              </a:spcAft>
-            </a:pPr>
-            <a:r>
-              <a:rPr sz="2000" b="0" i="0">
-                <a:solidFill>
-                  <a:srgbClr val="1A1A1A"/>
-                </a:solidFill>
-                <a:latin typeface="Arial"/>
-              </a:rPr>
-              <a:t>Once-only says the three learner lists become one, so the target has a single authoritative Learner Registry. Reuse-before-build says education consumes the national identity rather than minting its own, so the target shows the Examination Authority consuming the Identity Authority.</a:t>
-            </a:r>
-          </a:p>
-          <a:p>
-            <a:pPr>
-              <a:spcAft>
-                <a:spcPts val="1200"/>
-              </a:spcAft>
-            </a:pPr>
-            <a:r>
-              <a:rPr sz="2000" b="0" i="0">
-                <a:solidFill>
-                  <a:srgbClr val="1A1A1A"/>
-                </a:solidFill>
-                <a:latin typeface="Arial"/>
-              </a:rPr>
-              <a:t>One-owner-per-domain resolves who owns what. Apply the principles to the current state and the target architecture almost draws itself.</a:t>
-            </a:r>
-          </a:p>
-        </p:txBody>
-      </p:sp>
-      <p:sp>
-        <p:nvSpPr>
-          <p:cNvPr id="5" name="Rounded Rectangle 4"/>
-          <p:cNvSpPr/>
-          <p:nvPr/>
-        </p:nvSpPr>
-        <p:spPr>
-          <a:xfrm>
-            <a:off x="658368" y="4434840"/>
-            <a:ext cx="10881360" cy="1325880"/>
-          </a:xfrm>
-          <a:prstGeom prst="roundRect">
-            <a:avLst>
-              <a:gd name="adj" fmla="val 4500"/>
-            </a:avLst>
-          </a:prstGeom>
-          <a:solidFill>
-            <a:srgbClr val="E5F5FB"/>
-          </a:solidFill>
-          <a:ln>
-            <a:noFill/>
-          </a:ln>
-          <a:effectLst/>
-        </p:spPr>
-        <p:style>
-          <a:lnRef idx="1">
-            <a:schemeClr val="accent1"/>
-          </a:lnRef>
-          <a:fillRef idx="3">
-            <a:schemeClr val="accent1"/>
-          </a:fillRef>
-          <a:effectRef idx="2">
-            <a:schemeClr val="accent1"/>
-          </a:effectRef>
-          <a:fontRef idx="minor">
-            <a:schemeClr val="lt1"/>
-          </a:fontRef>
-        </p:style>
-        <p:txBody>
-          <a:bodyPr rtlCol="0" anchor="ctr"/>
-          <a:lstStyle/>
-          <a:p>
-            <a:pPr algn="ctr"/>
-          </a:p>
-        </p:txBody>
-      </p:sp>
-      <p:sp>
-        <p:nvSpPr>
-          <p:cNvPr id="6" name="TextBox 5"/>
-          <p:cNvSpPr txBox="1"/>
-          <p:nvPr/>
-        </p:nvSpPr>
-        <p:spPr>
-          <a:xfrm>
-            <a:off x="859536" y="4626864"/>
-            <a:ext cx="10479024" cy="1051560"/>
-          </a:xfrm>
-          <a:prstGeom prst="rect">
-            <a:avLst/>
-          </a:prstGeom>
-          <a:noFill/>
-        </p:spPr>
-        <p:txBody>
-          <a:bodyPr wrap="square">
-            <a:spAutoFit/>
-          </a:bodyPr>
-          <a:lstStyle/>
-          <a:p>
-            <a:pPr>
-              <a:spcAft>
-                <a:spcPts val="700"/>
-              </a:spcAft>
-            </a:pPr>
-            <a:r>
-              <a:rPr sz="2300" b="1" i="0">
-                <a:solidFill>
-                  <a:srgbClr val="006E96"/>
-                </a:solidFill>
-                <a:latin typeface="Arial"/>
-              </a:rPr>
-              <a:t>The principles are not decoration. They are the design rules.</a:t>
-            </a:r>
-          </a:p>
-        </p:txBody>
-      </p:sp>
-      <p:sp>
-        <p:nvSpPr>
-          <p:cNvPr id="7" name="TextBox 6"/>
-          <p:cNvSpPr txBox="1"/>
-          <p:nvPr/>
-        </p:nvSpPr>
-        <p:spPr>
-          <a:xfrm>
-            <a:off x="457200" y="6473952"/>
-            <a:ext cx="7772400" cy="292608"/>
-          </a:xfrm>
-          <a:prstGeom prst="rect">
-            <a:avLst/>
-          </a:prstGeom>
-          <a:noFill/>
-        </p:spPr>
-        <p:txBody>
-          <a:bodyPr wrap="square">
-            <a:spAutoFit/>
-          </a:bodyPr>
-          <a:lstStyle/>
-          <a:p>
-            <a:r>
-              <a:rPr sz="900" b="0" i="0">
-                <a:solidFill>
-                  <a:srgbClr val="595959"/>
-                </a:solidFill>
-                <a:latin typeface="Arial"/>
-              </a:rPr>
-              <a:t>4.5 · Phase 4, Plan — design the target architecture</a:t>
-            </a:r>
-          </a:p>
-        </p:txBody>
-      </p:sp>
-    </p:spTree>
-  </p:cSld>
-  <p:clrMapOvr>
-    <a:masterClrMapping/>
-  </p:clrMapOvr>
-</p:sld>
-</file>
-
-<file path=ppt/slides/slide34.xml><?xml version="1.0" encoding="utf-8"?>
-<p:sld xmlns:a="http://schemas.openxmlformats.org/drawingml/2006/main" xmlns:p="http://schemas.openxmlformats.org/presentationml/2006/main" xmlns:r="http://schemas.openxmlformats.org/officeDocument/2006/relationships">
-  <p:cSld>
-    <p:spTree>
-      <p:nvGrpSpPr>
-        <p:cNvPr id="1" name=""/>
-        <p:cNvGrpSpPr/>
-        <p:nvPr/>
-      </p:nvGrpSpPr>
-      <p:grpSpPr/>
-      <p:sp>
-        <p:nvSpPr>
-          <p:cNvPr id="2" name="Rectangle 1"/>
-          <p:cNvSpPr/>
-          <p:nvPr/>
-        </p:nvSpPr>
-        <p:spPr>
-          <a:xfrm>
-            <a:off x="457200" y="384048"/>
-            <a:ext cx="45720" cy="256032"/>
-          </a:xfrm>
-          <a:prstGeom prst="rect">
-            <a:avLst/>
-          </a:prstGeom>
-          <a:solidFill>
-            <a:srgbClr val="009CD6"/>
-          </a:solidFill>
-          <a:ln>
-            <a:noFill/>
-          </a:ln>
-          <a:effectLst/>
-        </p:spPr>
-        <p:style>
-          <a:lnRef idx="1">
-            <a:schemeClr val="accent1"/>
-          </a:lnRef>
-          <a:fillRef idx="3">
-            <a:schemeClr val="accent1"/>
-          </a:fillRef>
-          <a:effectRef idx="2">
-            <a:schemeClr val="accent1"/>
-          </a:effectRef>
-          <a:fontRef idx="minor">
-            <a:schemeClr val="lt1"/>
-          </a:fontRef>
-        </p:style>
-        <p:txBody>
-          <a:bodyPr rtlCol="0" anchor="ctr"/>
-          <a:lstStyle/>
-          <a:p>
-            <a:pPr algn="ctr"/>
-          </a:p>
-        </p:txBody>
-      </p:sp>
-      <p:sp>
-        <p:nvSpPr>
-          <p:cNvPr id="3" name="TextBox 2"/>
-          <p:cNvSpPr txBox="1"/>
-          <p:nvPr/>
-        </p:nvSpPr>
-        <p:spPr>
-          <a:xfrm>
-            <a:off x="621792" y="274320"/>
-            <a:ext cx="11247120" cy="914400"/>
-          </a:xfrm>
-          <a:prstGeom prst="rect">
-            <a:avLst/>
-          </a:prstGeom>
-          <a:noFill/>
-        </p:spPr>
-        <p:txBody>
-          <a:bodyPr wrap="square">
-            <a:spAutoFit/>
-          </a:bodyPr>
-          <a:lstStyle/>
-          <a:p>
-            <a:r>
-              <a:rPr sz="2800" b="1" i="0">
-                <a:solidFill>
-                  <a:srgbClr val="1A1A1A"/>
-                </a:solidFill>
-                <a:latin typeface="Arial"/>
-              </a:rPr>
-              <a:t>The integration map is the one artefact the current state never had</a:t>
-            </a:r>
-          </a:p>
-        </p:txBody>
-      </p:sp>
-      <p:sp>
-        <p:nvSpPr>
-          <p:cNvPr id="4" name="TextBox 3"/>
-          <p:cNvSpPr txBox="1"/>
-          <p:nvPr/>
-        </p:nvSpPr>
-        <p:spPr>
-          <a:xfrm>
-            <a:off x="658368" y="1600200"/>
-            <a:ext cx="10881360" cy="2651760"/>
-          </a:xfrm>
-          <a:prstGeom prst="rect">
-            <a:avLst/>
-          </a:prstGeom>
-          <a:noFill/>
-        </p:spPr>
-        <p:txBody>
-          <a:bodyPr wrap="square">
-            <a:spAutoFit/>
-          </a:bodyPr>
-          <a:lstStyle/>
-          <a:p>
-            <a:pPr>
-              <a:spcAft>
-                <a:spcPts val="1200"/>
-              </a:spcAft>
-            </a:pPr>
-            <a:r>
-              <a:rPr sz="2000" b="0" i="0">
-                <a:solidFill>
-                  <a:srgbClr val="1A1A1A"/>
-                </a:solidFill>
-                <a:latin typeface="Arial"/>
-              </a:rPr>
-              <a:t>It names which bodies exchange which data, over what mechanism, in what priority order. On Progressa: the Examination Authority reads the learner from the Learner Registry and the identity from the Identity Authority, both over the Digital Government Authority's backbone, replacing the paper re-entry.</a:t>
-            </a:r>
-          </a:p>
-          <a:p>
-            <a:pPr>
-              <a:spcAft>
-                <a:spcPts val="1200"/>
-              </a:spcAft>
-            </a:pPr>
-            <a:r>
-              <a:rPr sz="2000" b="0" i="0">
-                <a:solidFill>
-                  <a:srgbClr val="1A1A1A"/>
-                </a:solidFill>
-                <a:latin typeface="Arial"/>
-              </a:rPr>
-              <a:t>It is the target's connective tissue — the picture of a government whose systems finally talk to each other.</a:t>
-            </a:r>
-          </a:p>
-        </p:txBody>
-      </p:sp>
-      <p:sp>
-        <p:nvSpPr>
-          <p:cNvPr id="5" name="Rounded Rectangle 4"/>
-          <p:cNvSpPr/>
-          <p:nvPr/>
-        </p:nvSpPr>
-        <p:spPr>
-          <a:xfrm>
-            <a:off x="658368" y="4434840"/>
-            <a:ext cx="10881360" cy="1325880"/>
-          </a:xfrm>
-          <a:prstGeom prst="roundRect">
-            <a:avLst>
-              <a:gd name="adj" fmla="val 4500"/>
-            </a:avLst>
-          </a:prstGeom>
-          <a:solidFill>
-            <a:srgbClr val="E5F5FB"/>
-          </a:solidFill>
-          <a:ln>
-            <a:noFill/>
-          </a:ln>
-          <a:effectLst/>
-        </p:spPr>
-        <p:style>
-          <a:lnRef idx="1">
-            <a:schemeClr val="accent1"/>
-          </a:lnRef>
-          <a:fillRef idx="3">
-            <a:schemeClr val="accent1"/>
-          </a:fillRef>
-          <a:effectRef idx="2">
-            <a:schemeClr val="accent1"/>
-          </a:effectRef>
-          <a:fontRef idx="minor">
-            <a:schemeClr val="lt1"/>
-          </a:fontRef>
-        </p:style>
-        <p:txBody>
-          <a:bodyPr rtlCol="0" anchor="ctr"/>
-          <a:lstStyle/>
-          <a:p>
-            <a:pPr algn="ctr"/>
-          </a:p>
-        </p:txBody>
-      </p:sp>
-      <p:sp>
-        <p:nvSpPr>
-          <p:cNvPr id="6" name="TextBox 5"/>
-          <p:cNvSpPr txBox="1"/>
-          <p:nvPr/>
-        </p:nvSpPr>
-        <p:spPr>
-          <a:xfrm>
-            <a:off x="859536" y="4626864"/>
-            <a:ext cx="10479024" cy="1051560"/>
-          </a:xfrm>
-          <a:prstGeom prst="rect">
-            <a:avLst/>
-          </a:prstGeom>
-          <a:noFill/>
-        </p:spPr>
-        <p:txBody>
-          <a:bodyPr wrap="square">
-            <a:spAutoFit/>
-          </a:bodyPr>
-          <a:lstStyle/>
-          <a:p>
-            <a:pPr>
-              <a:spcAft>
-                <a:spcPts val="700"/>
-              </a:spcAft>
-            </a:pPr>
-            <a:r>
-              <a:rPr sz="2300" b="1" i="0">
-                <a:solidFill>
-                  <a:srgbClr val="006E96"/>
-                </a:solidFill>
-                <a:latin typeface="Arial"/>
-              </a:rPr>
-              <a:t>A first cut here. The full design is the interoperability knowledge product.</a:t>
-            </a:r>
-          </a:p>
-        </p:txBody>
-      </p:sp>
-      <p:sp>
-        <p:nvSpPr>
-          <p:cNvPr id="7" name="TextBox 6"/>
-          <p:cNvSpPr txBox="1"/>
-          <p:nvPr/>
-        </p:nvSpPr>
-        <p:spPr>
-          <a:xfrm>
-            <a:off x="457200" y="6473952"/>
-            <a:ext cx="7772400" cy="292608"/>
-          </a:xfrm>
-          <a:prstGeom prst="rect">
-            <a:avLst/>
-          </a:prstGeom>
-          <a:noFill/>
-        </p:spPr>
-        <p:txBody>
-          <a:bodyPr wrap="square">
-            <a:spAutoFit/>
-          </a:bodyPr>
-          <a:lstStyle/>
-          <a:p>
-            <a:r>
-              <a:rPr sz="900" b="0" i="0">
-                <a:solidFill>
-                  <a:srgbClr val="595959"/>
-                </a:solidFill>
-                <a:latin typeface="Arial"/>
-              </a:rPr>
-              <a:t>4.5 · Phase 4, Plan — design the target architecture</a:t>
-            </a:r>
-          </a:p>
-        </p:txBody>
-      </p:sp>
-    </p:spTree>
-  </p:cSld>
-  <p:clrMapOvr>
-    <a:masterClrMapping/>
-  </p:clrMapOvr>
-</p:sld>
-</file>
-
 <file path=ppt/slides/slide35.xml><?xml version="1.0" encoding="utf-8"?>
 <p:sld xmlns:a="http://schemas.openxmlformats.org/drawingml/2006/main" xmlns:p="http://schemas.openxmlformats.org/presentationml/2006/main" xmlns:r="http://schemas.openxmlformats.org/officeDocument/2006/relationships">
   <p:cSld>
@@ -13770,58 +11602,14 @@
       <p:grpSpPr/>
       <p:sp>
         <p:nvSpPr>
-          <p:cNvPr id="2" name="Rectangle 1"/>
-          <p:cNvSpPr/>
-          <p:nvPr/>
-        </p:nvSpPr>
-        <p:spPr>
-          <a:xfrm>
-            <a:off x="457200" y="384048"/>
-            <a:ext cx="45720" cy="256032"/>
-          </a:xfrm>
-          <a:prstGeom prst="rect">
-            <a:avLst/>
-          </a:prstGeom>
-          <a:solidFill>
-            <a:srgbClr val="009CD6"/>
-          </a:solidFill>
-          <a:ln>
-            <a:noFill/>
-          </a:ln>
-          <a:effectLst/>
-        </p:spPr>
-        <p:style>
-          <a:lnRef idx="1">
-            <a:schemeClr val="accent1"/>
-          </a:lnRef>
-          <a:fillRef idx="3">
-            <a:schemeClr val="accent1"/>
-          </a:fillRef>
-          <a:effectRef idx="2">
-            <a:schemeClr val="accent1"/>
-          </a:effectRef>
-          <a:fontRef idx="minor">
-            <a:schemeClr val="lt1"/>
-          </a:fontRef>
-        </p:style>
-        <p:txBody>
-          <a:bodyPr rtlCol="0" anchor="ctr"/>
-          <a:lstStyle/>
-          <a:p>
-            <a:pPr algn="ctr"/>
-          </a:p>
-        </p:txBody>
-      </p:sp>
-      <p:sp>
-        <p:nvSpPr>
-          <p:cNvPr id="3" name="TextBox 2"/>
+          <p:cNvPr id="2" name="TextBox 1"/>
           <p:cNvSpPr txBox="1"/>
           <p:nvPr/>
         </p:nvSpPr>
         <p:spPr>
           <a:xfrm>
-            <a:off x="621792" y="274320"/>
-            <a:ext cx="11247120" cy="914400"/>
+            <a:off x="822960" y="822960"/>
+            <a:ext cx="7315200" cy="457200"/>
           </a:xfrm>
           <a:prstGeom prst="rect">
             <a:avLst/>
@@ -13835,27 +11623,95 @@
           <a:lstStyle/>
           <a:p>
             <a:r>
-              <a:rPr sz="2800" b="1" i="0">
+              <a:rPr sz="1200" b="1" i="0">
+                <a:solidFill>
+                  <a:srgbClr val="595959"/>
+                </a:solidFill>
+                <a:latin typeface="Arial"/>
+              </a:rPr>
+              <a:t>KP1 · MODULE 4 · VIDEO 4.5</a:t>
+            </a:r>
+          </a:p>
+        </p:txBody>
+      </p:sp>
+      <p:sp>
+        <p:nvSpPr>
+          <p:cNvPr id="3" name="TextBox 2"/>
+          <p:cNvSpPr txBox="1"/>
+          <p:nvPr/>
+        </p:nvSpPr>
+        <p:spPr>
+          <a:xfrm>
+            <a:off x="822960" y="1828800"/>
+            <a:ext cx="2011680" cy="1097280"/>
+          </a:xfrm>
+          <a:prstGeom prst="rect">
+            <a:avLst/>
+          </a:prstGeom>
+          <a:noFill/>
+        </p:spPr>
+        <p:txBody>
+          <a:bodyPr wrap="square">
+            <a:spAutoFit/>
+          </a:bodyPr>
+          <a:lstStyle/>
+          <a:p>
+            <a:r>
+              <a:rPr sz="6000" b="1" i="0">
+                <a:solidFill>
+                  <a:srgbClr val="009CD6"/>
+                </a:solidFill>
+                <a:latin typeface="Arial"/>
+              </a:rPr>
+              <a:t>4.5</a:t>
+            </a:r>
+          </a:p>
+        </p:txBody>
+      </p:sp>
+      <p:sp>
+        <p:nvSpPr>
+          <p:cNvPr id="4" name="TextBox 3"/>
+          <p:cNvSpPr txBox="1"/>
+          <p:nvPr/>
+        </p:nvSpPr>
+        <p:spPr>
+          <a:xfrm>
+            <a:off x="822960" y="2880360"/>
+            <a:ext cx="9601200" cy="1371600"/>
+          </a:xfrm>
+          <a:prstGeom prst="rect">
+            <a:avLst/>
+          </a:prstGeom>
+          <a:noFill/>
+        </p:spPr>
+        <p:txBody>
+          <a:bodyPr wrap="square">
+            <a:spAutoFit/>
+          </a:bodyPr>
+          <a:lstStyle/>
+          <a:p>
+            <a:r>
+              <a:rPr sz="3400" b="1" i="0">
                 <a:solidFill>
                   <a:srgbClr val="1A1A1A"/>
                 </a:solidFill>
                 <a:latin typeface="Arial"/>
               </a:rPr>
-              <a:t>Every target element traces back to a gap and forward to a sourcing call</a:t>
-            </a:r>
-          </a:p>
-        </p:txBody>
-      </p:sp>
-      <p:sp>
-        <p:nvSpPr>
-          <p:cNvPr id="4" name="TextBox 3"/>
+              <a:t>Phase 4, Plan — design the target architecture</a:t>
+            </a:r>
+          </a:p>
+        </p:txBody>
+      </p:sp>
+      <p:sp>
+        <p:nvSpPr>
+          <p:cNvPr id="5" name="TextBox 4"/>
           <p:cNvSpPr txBox="1"/>
           <p:nvPr/>
         </p:nvSpPr>
         <p:spPr>
           <a:xfrm>
-            <a:off x="658368" y="1600200"/>
-            <a:ext cx="10881360" cy="2651760"/>
+            <a:off x="822960" y="4343400"/>
+            <a:ext cx="9875520" cy="1554480"/>
           </a:xfrm>
           <a:prstGeom prst="rect">
             <a:avLst/>
@@ -13868,154 +11724,48 @@
           </a:bodyPr>
           <a:lstStyle/>
           <a:p>
-            <a:pPr>
-              <a:spcAft>
-                <a:spcPts val="1200"/>
-              </a:spcAft>
-            </a:pPr>
-            <a:r>
-              <a:rPr sz="2000" b="0" i="0">
-                <a:solidFill>
-                  <a:srgbClr val="1A1A1A"/>
-                </a:solidFill>
-                <a:latin typeface="Arial"/>
-              </a:rPr>
-              <a:t>The target must be reachable, not a fantasy. Each element should trace back to a gap it closes, and forward to a sourcing decision — build, buy or share — that obtains it.</a:t>
-            </a:r>
-          </a:p>
-          <a:p>
-            <a:pPr>
-              <a:spcAft>
-                <a:spcPts val="1200"/>
-              </a:spcAft>
-            </a:pPr>
-            <a:r>
-              <a:rPr sz="2000" b="0" i="0">
-                <a:solidFill>
-                  <a:srgbClr val="1A1A1A"/>
-                </a:solidFill>
-                <a:latin typeface="Arial"/>
-              </a:rPr>
-              <a:t>So the target architecture and the sourcing decisions are designed together, and signed off together, as the agreed destination the roadmap then sequences.</a:t>
-            </a:r>
-          </a:p>
-        </p:txBody>
-      </p:sp>
-      <p:sp>
-        <p:nvSpPr>
-          <p:cNvPr id="5" name="Rounded Rectangle 4"/>
-          <p:cNvSpPr/>
-          <p:nvPr/>
-        </p:nvSpPr>
-        <p:spPr>
-          <a:xfrm>
-            <a:off x="658368" y="4434840"/>
-            <a:ext cx="10881360" cy="1325880"/>
-          </a:xfrm>
-          <a:prstGeom prst="roundRect">
-            <a:avLst>
-              <a:gd name="adj" fmla="val 4500"/>
-            </a:avLst>
-          </a:prstGeom>
-          <a:solidFill>
-            <a:srgbClr val="E5F5FB"/>
-          </a:solidFill>
-          <a:ln>
-            <a:noFill/>
-          </a:ln>
-          <a:effectLst/>
-        </p:spPr>
-        <p:style>
-          <a:lnRef idx="1">
-            <a:schemeClr val="accent1"/>
-          </a:lnRef>
-          <a:fillRef idx="3">
-            <a:schemeClr val="accent1"/>
-          </a:fillRef>
-          <a:effectRef idx="2">
-            <a:schemeClr val="accent1"/>
-          </a:effectRef>
-          <a:fontRef idx="minor">
-            <a:schemeClr val="lt1"/>
-          </a:fontRef>
-        </p:style>
-        <p:txBody>
-          <a:bodyPr rtlCol="0" anchor="ctr"/>
-          <a:lstStyle/>
-          <a:p>
-            <a:pPr algn="ctr"/>
-          </a:p>
-        </p:txBody>
-      </p:sp>
-      <p:sp>
-        <p:nvSpPr>
-          <p:cNvPr id="6" name="TextBox 5"/>
-          <p:cNvSpPr txBox="1"/>
-          <p:nvPr/>
-        </p:nvSpPr>
-        <p:spPr>
-          <a:xfrm>
-            <a:off x="859536" y="4626864"/>
-            <a:ext cx="10479024" cy="1051560"/>
-          </a:xfrm>
-          <a:prstGeom prst="rect">
-            <a:avLst/>
-          </a:prstGeom>
-          <a:noFill/>
-        </p:spPr>
-        <p:txBody>
-          <a:bodyPr wrap="square">
-            <a:spAutoFit/>
-          </a:bodyPr>
-          <a:lstStyle/>
-          <a:p>
-            <a:pPr>
-              <a:spcAft>
-                <a:spcPts val="700"/>
-              </a:spcAft>
-            </a:pPr>
-            <a:r>
-              <a:rPr sz="2300" b="1" i="0">
-                <a:solidFill>
-                  <a:srgbClr val="006E96"/>
-                </a:solidFill>
-                <a:latin typeface="Arial"/>
-              </a:rPr>
-              <a:t>A target capability with no way to obtain it is a wish, not an architecture.</a:t>
-            </a:r>
-          </a:p>
-        </p:txBody>
-      </p:sp>
-      <p:sp>
-        <p:nvSpPr>
-          <p:cNvPr id="7" name="TextBox 6"/>
-          <p:cNvSpPr txBox="1"/>
-          <p:nvPr/>
-        </p:nvSpPr>
-        <p:spPr>
-          <a:xfrm>
-            <a:off x="457200" y="6473952"/>
-            <a:ext cx="7772400" cy="292608"/>
-          </a:xfrm>
-          <a:prstGeom prst="rect">
-            <a:avLst/>
-          </a:prstGeom>
-          <a:noFill/>
-        </p:spPr>
-        <p:txBody>
-          <a:bodyPr wrap="square">
-            <a:spAutoFit/>
-          </a:bodyPr>
-          <a:lstStyle/>
-          <a:p>
-            <a:r>
-              <a:rPr sz="900" b="0" i="0">
+            <a:r>
+              <a:rPr sz="1700" b="0" i="1">
                 <a:solidFill>
                   <a:srgbClr val="595959"/>
                 </a:solidFill>
                 <a:latin typeface="Arial"/>
               </a:rPr>
-              <a:t>4.5 · Phase 4, Plan — design the target architecture</a:t>
+              <a:t>Between the gaps and the roadmap sits the deliverable the whole EA is for — the target architecture: a future-state picture of the capabilities, the data owners, the shared platforms and the integration map your government should have. Design it by applying your principles to the gaps, and the roadmap finally has somewhere to go.</a:t>
+            </a:r>
+          </a:p>
+        </p:txBody>
+      </p:sp>
+      <p:sp>
+        <p:nvSpPr>
+          <p:cNvPr id="6" name="TextBox 5"/>
+          <p:cNvSpPr txBox="1"/>
+          <p:nvPr/>
+        </p:nvSpPr>
+        <p:spPr>
+          <a:xfrm>
+            <a:off x="822960" y="5989320"/>
+            <a:ext cx="7315200" cy="365760"/>
+          </a:xfrm>
+          <a:prstGeom prst="rect">
+            <a:avLst/>
+          </a:prstGeom>
+          <a:noFill/>
+        </p:spPr>
+        <p:txBody>
+          <a:bodyPr wrap="square">
+            <a:spAutoFit/>
+          </a:bodyPr>
+          <a:lstStyle/>
+          <a:p>
+            <a:r>
+              <a:rPr sz="1200" b="0" i="0">
+                <a:solidFill>
+                  <a:srgbClr val="595959"/>
+                </a:solidFill>
+                <a:latin typeface="Arial"/>
+              </a:rPr>
+              <a:t>~4 minutes · standalone video · voice-over on text slides</a:t>
             </a:r>
           </a:p>
         </p:txBody>
@@ -14046,6 +11796,1754 @@
         </p:nvSpPr>
         <p:spPr>
           <a:xfrm>
+            <a:off x="1005840" y="1325880"/>
+            <a:ext cx="5486400" cy="365760"/>
+          </a:xfrm>
+          <a:prstGeom prst="rect">
+            <a:avLst/>
+          </a:prstGeom>
+          <a:noFill/>
+        </p:spPr>
+        <p:txBody>
+          <a:bodyPr wrap="square">
+            <a:spAutoFit/>
+          </a:bodyPr>
+          <a:lstStyle/>
+          <a:p>
+            <a:r>
+              <a:rPr sz="1200" b="1" i="0">
+                <a:solidFill>
+                  <a:srgbClr val="006E96"/>
+                </a:solidFill>
+                <a:latin typeface="Arial"/>
+              </a:rPr>
+              <a:t>WHERE WE START</a:t>
+            </a:r>
+          </a:p>
+        </p:txBody>
+      </p:sp>
+      <p:sp>
+        <p:nvSpPr>
+          <p:cNvPr id="3" name="TextBox 2"/>
+          <p:cNvSpPr txBox="1"/>
+          <p:nvPr/>
+        </p:nvSpPr>
+        <p:spPr>
+          <a:xfrm>
+            <a:off x="1005840" y="1783080"/>
+            <a:ext cx="10149840" cy="1737360"/>
+          </a:xfrm>
+          <a:prstGeom prst="rect">
+            <a:avLst/>
+          </a:prstGeom>
+          <a:noFill/>
+        </p:spPr>
+        <p:txBody>
+          <a:bodyPr wrap="square">
+            <a:spAutoFit/>
+          </a:bodyPr>
+          <a:lstStyle/>
+          <a:p>
+            <a:r>
+              <a:rPr sz="3000" b="1" i="0">
+                <a:solidFill>
+                  <a:srgbClr val="1A1A1A"/>
+                </a:solidFill>
+                <a:latin typeface="Arial"/>
+              </a:rPr>
+              <a:t>The target architecture: the picture of the future state you are building toward.</a:t>
+            </a:r>
+          </a:p>
+        </p:txBody>
+      </p:sp>
+      <p:sp>
+        <p:nvSpPr>
+          <p:cNvPr id="4" name="TextBox 3"/>
+          <p:cNvSpPr txBox="1"/>
+          <p:nvPr/>
+        </p:nvSpPr>
+        <p:spPr>
+          <a:xfrm>
+            <a:off x="1005840" y="3611880"/>
+            <a:ext cx="10149840" cy="2377440"/>
+          </a:xfrm>
+          <a:prstGeom prst="rect">
+            <a:avLst/>
+          </a:prstGeom>
+          <a:noFill/>
+        </p:spPr>
+        <p:txBody>
+          <a:bodyPr wrap="square">
+            <a:spAutoFit/>
+          </a:bodyPr>
+          <a:lstStyle/>
+          <a:p>
+            <a:pPr>
+              <a:spcAft>
+                <a:spcPts val="800"/>
+              </a:spcAft>
+            </a:pPr>
+            <a:r>
+              <a:rPr sz="1700" b="0" i="0">
+                <a:solidFill>
+                  <a:srgbClr val="595959"/>
+                </a:solidFill>
+                <a:latin typeface="Arial"/>
+              </a:rPr>
+              <a:t>It sits between where Progressa is today and how it gets somewhere.</a:t>
+            </a:r>
+          </a:p>
+          <a:p>
+            <a:pPr>
+              <a:spcAft>
+                <a:spcPts val="800"/>
+              </a:spcAft>
+            </a:pPr>
+            <a:r>
+              <a:rPr sz="1700" b="0" i="0">
+                <a:solidFill>
+                  <a:srgbClr val="595959"/>
+                </a:solidFill>
+                <a:latin typeface="Arial"/>
+              </a:rPr>
+              <a:t>Skip it, and you sequence a roadmap to a destination nobody drew.</a:t>
+            </a:r>
+          </a:p>
+        </p:txBody>
+      </p:sp>
+      <p:sp>
+        <p:nvSpPr>
+          <p:cNvPr id="5" name="TextBox 4"/>
+          <p:cNvSpPr txBox="1"/>
+          <p:nvPr/>
+        </p:nvSpPr>
+        <p:spPr>
+          <a:xfrm>
+            <a:off x="457200" y="6473952"/>
+            <a:ext cx="7772400" cy="292608"/>
+          </a:xfrm>
+          <a:prstGeom prst="rect">
+            <a:avLst/>
+          </a:prstGeom>
+          <a:noFill/>
+        </p:spPr>
+        <p:txBody>
+          <a:bodyPr wrap="square">
+            <a:spAutoFit/>
+          </a:bodyPr>
+          <a:lstStyle/>
+          <a:p>
+            <a:r>
+              <a:rPr sz="900" b="0" i="0">
+                <a:solidFill>
+                  <a:srgbClr val="595959"/>
+                </a:solidFill>
+                <a:latin typeface="Arial"/>
+              </a:rPr>
+              <a:t>4.5 · Phase 4, Plan — design the target architecture</a:t>
+            </a:r>
+          </a:p>
+        </p:txBody>
+      </p:sp>
+      <p:sp>
+        <p:nvSpPr>
+          <p:cNvPr id="6" name="TextBox 5"/>
+          <p:cNvSpPr txBox="1"/>
+          <p:nvPr/>
+        </p:nvSpPr>
+        <p:spPr>
+          <a:xfrm>
+            <a:off x="10058400" y="6473952"/>
+            <a:ext cx="1673352" cy="292608"/>
+          </a:xfrm>
+          <a:prstGeom prst="rect">
+            <a:avLst/>
+          </a:prstGeom>
+          <a:noFill/>
+        </p:spPr>
+        <p:txBody>
+          <a:bodyPr wrap="square">
+            <a:spAutoFit/>
+          </a:bodyPr>
+          <a:lstStyle/>
+          <a:p>
+            <a:pPr algn="r"/>
+            <a:r>
+              <a:rPr sz="900" b="0" i="0">
+                <a:solidFill>
+                  <a:srgbClr val="595959"/>
+                </a:solidFill>
+                <a:latin typeface="Arial"/>
+              </a:rPr>
+              <a:t>www.itu.int</a:t>
+            </a:r>
+          </a:p>
+        </p:txBody>
+      </p:sp>
+    </p:spTree>
+  </p:cSld>
+  <p:clrMapOvr>
+    <a:masterClrMapping/>
+  </p:clrMapOvr>
+</p:sld>
+</file>
+
+<file path=ppt/slides/slide37.xml><?xml version="1.0" encoding="utf-8"?>
+<p:sld xmlns:a="http://schemas.openxmlformats.org/drawingml/2006/main" xmlns:p="http://schemas.openxmlformats.org/presentationml/2006/main" xmlns:r="http://schemas.openxmlformats.org/officeDocument/2006/relationships">
+  <p:cSld>
+    <p:spTree>
+      <p:nvGrpSpPr>
+        <p:cNvPr id="1" name=""/>
+        <p:cNvGrpSpPr/>
+        <p:nvPr/>
+      </p:nvGrpSpPr>
+      <p:grpSpPr/>
+      <p:sp>
+        <p:nvSpPr>
+          <p:cNvPr id="2" name="Rectangle 1"/>
+          <p:cNvSpPr/>
+          <p:nvPr/>
+        </p:nvSpPr>
+        <p:spPr>
+          <a:xfrm>
+            <a:off x="457200" y="384048"/>
+            <a:ext cx="45720" cy="256032"/>
+          </a:xfrm>
+          <a:prstGeom prst="rect">
+            <a:avLst/>
+          </a:prstGeom>
+          <a:solidFill>
+            <a:srgbClr val="009CD6"/>
+          </a:solidFill>
+          <a:ln>
+            <a:noFill/>
+          </a:ln>
+          <a:effectLst/>
+        </p:spPr>
+        <p:style>
+          <a:lnRef idx="1">
+            <a:schemeClr val="accent1"/>
+          </a:lnRef>
+          <a:fillRef idx="3">
+            <a:schemeClr val="accent1"/>
+          </a:fillRef>
+          <a:effectRef idx="2">
+            <a:schemeClr val="accent1"/>
+          </a:effectRef>
+          <a:fontRef idx="minor">
+            <a:schemeClr val="lt1"/>
+          </a:fontRef>
+        </p:style>
+        <p:txBody>
+          <a:bodyPr rtlCol="0" anchor="ctr"/>
+          <a:lstStyle/>
+          <a:p>
+            <a:pPr algn="ctr"/>
+          </a:p>
+        </p:txBody>
+      </p:sp>
+      <p:sp>
+        <p:nvSpPr>
+          <p:cNvPr id="3" name="TextBox 2"/>
+          <p:cNvSpPr txBox="1"/>
+          <p:nvPr/>
+        </p:nvSpPr>
+        <p:spPr>
+          <a:xfrm>
+            <a:off x="621792" y="274320"/>
+            <a:ext cx="11247120" cy="914400"/>
+          </a:xfrm>
+          <a:prstGeom prst="rect">
+            <a:avLst/>
+          </a:prstGeom>
+          <a:noFill/>
+        </p:spPr>
+        <p:txBody>
+          <a:bodyPr wrap="square">
+            <a:spAutoFit/>
+          </a:bodyPr>
+          <a:lstStyle/>
+          <a:p>
+            <a:r>
+              <a:rPr sz="2800" b="1" i="0">
+                <a:solidFill>
+                  <a:srgbClr val="1A1A1A"/>
+                </a:solidFill>
+                <a:latin typeface="Arial"/>
+              </a:rPr>
+              <a:t>The target is the current-state picture, designed instead of observed</a:t>
+            </a:r>
+          </a:p>
+        </p:txBody>
+      </p:sp>
+      <p:sp>
+        <p:nvSpPr>
+          <p:cNvPr id="4" name="Oval 3"/>
+          <p:cNvSpPr/>
+          <p:nvPr/>
+        </p:nvSpPr>
+        <p:spPr>
+          <a:xfrm>
+            <a:off x="621792" y="1508760"/>
+            <a:ext cx="310896" cy="310896"/>
+          </a:xfrm>
+          <a:prstGeom prst="ellipse">
+            <a:avLst/>
+          </a:prstGeom>
+          <a:solidFill>
+            <a:srgbClr val="009CD6"/>
+          </a:solidFill>
+          <a:ln>
+            <a:noFill/>
+          </a:ln>
+          <a:effectLst/>
+        </p:spPr>
+        <p:style>
+          <a:lnRef idx="1">
+            <a:schemeClr val="accent1"/>
+          </a:lnRef>
+          <a:fillRef idx="3">
+            <a:schemeClr val="accent1"/>
+          </a:fillRef>
+          <a:effectRef idx="2">
+            <a:schemeClr val="accent1"/>
+          </a:effectRef>
+          <a:fontRef idx="minor">
+            <a:schemeClr val="lt1"/>
+          </a:fontRef>
+        </p:style>
+        <p:txBody>
+          <a:bodyPr rtlCol="0" anchor="ctr" lIns="0" rIns="0" tIns="0" bIns="0" wrap="square"/>
+          <a:lstStyle/>
+          <a:p>
+            <a:pPr algn="ctr"/>
+            <a:r>
+              <a:rPr sz="1300" b="1" i="0">
+                <a:solidFill>
+                  <a:srgbClr val="FFFFFF"/>
+                </a:solidFill>
+                <a:latin typeface="Arial"/>
+              </a:rPr>
+              <a:t>1</a:t>
+            </a:r>
+          </a:p>
+        </p:txBody>
+      </p:sp>
+      <p:sp>
+        <p:nvSpPr>
+          <p:cNvPr id="5" name="TextBox 4"/>
+          <p:cNvSpPr txBox="1"/>
+          <p:nvPr/>
+        </p:nvSpPr>
+        <p:spPr>
+          <a:xfrm>
+            <a:off x="1115568" y="1463040"/>
+            <a:ext cx="10527487" cy="1028699"/>
+          </a:xfrm>
+          <a:prstGeom prst="rect">
+            <a:avLst/>
+          </a:prstGeom>
+          <a:noFill/>
+        </p:spPr>
+        <p:txBody>
+          <a:bodyPr wrap="square">
+            <a:spAutoFit/>
+          </a:bodyPr>
+          <a:lstStyle/>
+          <a:p>
+            <a:pPr>
+              <a:spcAft>
+                <a:spcPts val="300"/>
+              </a:spcAft>
+            </a:pPr>
+            <a:r>
+              <a:rPr sz="1900" b="1" i="0">
+                <a:solidFill>
+                  <a:srgbClr val="1A1A1A"/>
+                </a:solidFill>
+                <a:latin typeface="Arial"/>
+              </a:rPr>
+              <a:t>Target capabilities</a:t>
+            </a:r>
+          </a:p>
+          <a:p>
+            <a:pPr>
+              <a:spcAft>
+                <a:spcPts val="300"/>
+              </a:spcAft>
+            </a:pPr>
+            <a:r>
+              <a:rPr sz="1550" b="0" i="0">
+                <a:solidFill>
+                  <a:srgbClr val="595959"/>
+                </a:solidFill>
+                <a:latin typeface="Arial"/>
+              </a:rPr>
+              <a:t>Each owned by exactly one body. The duplicates resolved.</a:t>
+            </a:r>
+          </a:p>
+        </p:txBody>
+      </p:sp>
+      <p:sp>
+        <p:nvSpPr>
+          <p:cNvPr id="6" name="Rectangle 5"/>
+          <p:cNvSpPr/>
+          <p:nvPr/>
+        </p:nvSpPr>
+        <p:spPr>
+          <a:xfrm>
+            <a:off x="621792" y="2496312"/>
+            <a:ext cx="10881360" cy="12700"/>
+          </a:xfrm>
+          <a:prstGeom prst="rect">
+            <a:avLst/>
+          </a:prstGeom>
+          <a:solidFill>
+            <a:srgbClr val="DDECF4"/>
+          </a:solidFill>
+          <a:ln>
+            <a:noFill/>
+          </a:ln>
+          <a:effectLst/>
+        </p:spPr>
+        <p:style>
+          <a:lnRef idx="1">
+            <a:schemeClr val="accent1"/>
+          </a:lnRef>
+          <a:fillRef idx="3">
+            <a:schemeClr val="accent1"/>
+          </a:fillRef>
+          <a:effectRef idx="2">
+            <a:schemeClr val="accent1"/>
+          </a:effectRef>
+          <a:fontRef idx="minor">
+            <a:schemeClr val="lt1"/>
+          </a:fontRef>
+        </p:style>
+        <p:txBody>
+          <a:bodyPr rtlCol="0" anchor="ctr"/>
+          <a:lstStyle/>
+          <a:p>
+            <a:pPr algn="ctr"/>
+          </a:p>
+        </p:txBody>
+      </p:sp>
+      <p:sp>
+        <p:nvSpPr>
+          <p:cNvPr id="7" name="Oval 6"/>
+          <p:cNvSpPr/>
+          <p:nvPr/>
+        </p:nvSpPr>
+        <p:spPr>
+          <a:xfrm>
+            <a:off x="621792" y="2583179"/>
+            <a:ext cx="310896" cy="310896"/>
+          </a:xfrm>
+          <a:prstGeom prst="ellipse">
+            <a:avLst/>
+          </a:prstGeom>
+          <a:solidFill>
+            <a:srgbClr val="009CD6"/>
+          </a:solidFill>
+          <a:ln>
+            <a:noFill/>
+          </a:ln>
+          <a:effectLst/>
+        </p:spPr>
+        <p:style>
+          <a:lnRef idx="1">
+            <a:schemeClr val="accent1"/>
+          </a:lnRef>
+          <a:fillRef idx="3">
+            <a:schemeClr val="accent1"/>
+          </a:fillRef>
+          <a:effectRef idx="2">
+            <a:schemeClr val="accent1"/>
+          </a:effectRef>
+          <a:fontRef idx="minor">
+            <a:schemeClr val="lt1"/>
+          </a:fontRef>
+        </p:style>
+        <p:txBody>
+          <a:bodyPr rtlCol="0" anchor="ctr" lIns="0" rIns="0" tIns="0" bIns="0" wrap="square"/>
+          <a:lstStyle/>
+          <a:p>
+            <a:pPr algn="ctr"/>
+            <a:r>
+              <a:rPr sz="1300" b="1" i="0">
+                <a:solidFill>
+                  <a:srgbClr val="FFFFFF"/>
+                </a:solidFill>
+                <a:latin typeface="Arial"/>
+              </a:rPr>
+              <a:t>2</a:t>
+            </a:r>
+          </a:p>
+        </p:txBody>
+      </p:sp>
+      <p:sp>
+        <p:nvSpPr>
+          <p:cNvPr id="8" name="TextBox 7"/>
+          <p:cNvSpPr txBox="1"/>
+          <p:nvPr/>
+        </p:nvSpPr>
+        <p:spPr>
+          <a:xfrm>
+            <a:off x="1115568" y="2537460"/>
+            <a:ext cx="10527487" cy="1028699"/>
+          </a:xfrm>
+          <a:prstGeom prst="rect">
+            <a:avLst/>
+          </a:prstGeom>
+          <a:noFill/>
+        </p:spPr>
+        <p:txBody>
+          <a:bodyPr wrap="square">
+            <a:spAutoFit/>
+          </a:bodyPr>
+          <a:lstStyle/>
+          <a:p>
+            <a:pPr>
+              <a:spcAft>
+                <a:spcPts val="300"/>
+              </a:spcAft>
+            </a:pPr>
+            <a:r>
+              <a:rPr sz="1900" b="1" i="0">
+                <a:solidFill>
+                  <a:srgbClr val="1A1A1A"/>
+                </a:solidFill>
+                <a:latin typeface="Arial"/>
+              </a:rPr>
+              <a:t>Target data domains</a:t>
+            </a:r>
+          </a:p>
+          <a:p>
+            <a:pPr>
+              <a:spcAft>
+                <a:spcPts val="300"/>
+              </a:spcAft>
+            </a:pPr>
+            <a:r>
+              <a:rPr sz="1550" b="0" i="0">
+                <a:solidFill>
+                  <a:srgbClr val="595959"/>
+                </a:solidFill>
+                <a:latin typeface="Arial"/>
+              </a:rPr>
+              <a:t>One authoritative owner for the learner, the person, the result.</a:t>
+            </a:r>
+          </a:p>
+        </p:txBody>
+      </p:sp>
+      <p:sp>
+        <p:nvSpPr>
+          <p:cNvPr id="9" name="Rectangle 8"/>
+          <p:cNvSpPr/>
+          <p:nvPr/>
+        </p:nvSpPr>
+        <p:spPr>
+          <a:xfrm>
+            <a:off x="621792" y="3570732"/>
+            <a:ext cx="10881360" cy="12700"/>
+          </a:xfrm>
+          <a:prstGeom prst="rect">
+            <a:avLst/>
+          </a:prstGeom>
+          <a:solidFill>
+            <a:srgbClr val="DDECF4"/>
+          </a:solidFill>
+          <a:ln>
+            <a:noFill/>
+          </a:ln>
+          <a:effectLst/>
+        </p:spPr>
+        <p:style>
+          <a:lnRef idx="1">
+            <a:schemeClr val="accent1"/>
+          </a:lnRef>
+          <a:fillRef idx="3">
+            <a:schemeClr val="accent1"/>
+          </a:fillRef>
+          <a:effectRef idx="2">
+            <a:schemeClr val="accent1"/>
+          </a:effectRef>
+          <a:fontRef idx="minor">
+            <a:schemeClr val="lt1"/>
+          </a:fontRef>
+        </p:style>
+        <p:txBody>
+          <a:bodyPr rtlCol="0" anchor="ctr"/>
+          <a:lstStyle/>
+          <a:p>
+            <a:pPr algn="ctr"/>
+          </a:p>
+        </p:txBody>
+      </p:sp>
+      <p:sp>
+        <p:nvSpPr>
+          <p:cNvPr id="10" name="Oval 9"/>
+          <p:cNvSpPr/>
+          <p:nvPr/>
+        </p:nvSpPr>
+        <p:spPr>
+          <a:xfrm>
+            <a:off x="621792" y="3657599"/>
+            <a:ext cx="310896" cy="310896"/>
+          </a:xfrm>
+          <a:prstGeom prst="ellipse">
+            <a:avLst/>
+          </a:prstGeom>
+          <a:solidFill>
+            <a:srgbClr val="009CD6"/>
+          </a:solidFill>
+          <a:ln>
+            <a:noFill/>
+          </a:ln>
+          <a:effectLst/>
+        </p:spPr>
+        <p:style>
+          <a:lnRef idx="1">
+            <a:schemeClr val="accent1"/>
+          </a:lnRef>
+          <a:fillRef idx="3">
+            <a:schemeClr val="accent1"/>
+          </a:fillRef>
+          <a:effectRef idx="2">
+            <a:schemeClr val="accent1"/>
+          </a:effectRef>
+          <a:fontRef idx="minor">
+            <a:schemeClr val="lt1"/>
+          </a:fontRef>
+        </p:style>
+        <p:txBody>
+          <a:bodyPr rtlCol="0" anchor="ctr" lIns="0" rIns="0" tIns="0" bIns="0" wrap="square"/>
+          <a:lstStyle/>
+          <a:p>
+            <a:pPr algn="ctr"/>
+            <a:r>
+              <a:rPr sz="1300" b="1" i="0">
+                <a:solidFill>
+                  <a:srgbClr val="FFFFFF"/>
+                </a:solidFill>
+                <a:latin typeface="Arial"/>
+              </a:rPr>
+              <a:t>3</a:t>
+            </a:r>
+          </a:p>
+        </p:txBody>
+      </p:sp>
+      <p:sp>
+        <p:nvSpPr>
+          <p:cNvPr id="11" name="TextBox 10"/>
+          <p:cNvSpPr txBox="1"/>
+          <p:nvPr/>
+        </p:nvSpPr>
+        <p:spPr>
+          <a:xfrm>
+            <a:off x="1115568" y="3611879"/>
+            <a:ext cx="10527487" cy="1028699"/>
+          </a:xfrm>
+          <a:prstGeom prst="rect">
+            <a:avLst/>
+          </a:prstGeom>
+          <a:noFill/>
+        </p:spPr>
+        <p:txBody>
+          <a:bodyPr wrap="square">
+            <a:spAutoFit/>
+          </a:bodyPr>
+          <a:lstStyle/>
+          <a:p>
+            <a:pPr>
+              <a:spcAft>
+                <a:spcPts val="300"/>
+              </a:spcAft>
+            </a:pPr>
+            <a:r>
+              <a:rPr sz="1900" b="1" i="0">
+                <a:solidFill>
+                  <a:srgbClr val="1A1A1A"/>
+                </a:solidFill>
+                <a:latin typeface="Arial"/>
+              </a:rPr>
+              <a:t>Target shared platforms</a:t>
+            </a:r>
+          </a:p>
+          <a:p>
+            <a:pPr>
+              <a:spcAft>
+                <a:spcPts val="300"/>
+              </a:spcAft>
+            </a:pPr>
+            <a:r>
+              <a:rPr sz="1550" b="0" i="0">
+                <a:solidFill>
+                  <a:srgbClr val="595959"/>
+                </a:solidFill>
+                <a:latin typeface="Arial"/>
+              </a:rPr>
+              <a:t>The identity platform and the data-exchange backbone, consumed by all.</a:t>
+            </a:r>
+          </a:p>
+        </p:txBody>
+      </p:sp>
+      <p:sp>
+        <p:nvSpPr>
+          <p:cNvPr id="12" name="Rectangle 11"/>
+          <p:cNvSpPr/>
+          <p:nvPr/>
+        </p:nvSpPr>
+        <p:spPr>
+          <a:xfrm>
+            <a:off x="621792" y="4645152"/>
+            <a:ext cx="10881360" cy="12700"/>
+          </a:xfrm>
+          <a:prstGeom prst="rect">
+            <a:avLst/>
+          </a:prstGeom>
+          <a:solidFill>
+            <a:srgbClr val="DDECF4"/>
+          </a:solidFill>
+          <a:ln>
+            <a:noFill/>
+          </a:ln>
+          <a:effectLst/>
+        </p:spPr>
+        <p:style>
+          <a:lnRef idx="1">
+            <a:schemeClr val="accent1"/>
+          </a:lnRef>
+          <a:fillRef idx="3">
+            <a:schemeClr val="accent1"/>
+          </a:fillRef>
+          <a:effectRef idx="2">
+            <a:schemeClr val="accent1"/>
+          </a:effectRef>
+          <a:fontRef idx="minor">
+            <a:schemeClr val="lt1"/>
+          </a:fontRef>
+        </p:style>
+        <p:txBody>
+          <a:bodyPr rtlCol="0" anchor="ctr"/>
+          <a:lstStyle/>
+          <a:p>
+            <a:pPr algn="ctr"/>
+          </a:p>
+        </p:txBody>
+      </p:sp>
+      <p:sp>
+        <p:nvSpPr>
+          <p:cNvPr id="13" name="Oval 12"/>
+          <p:cNvSpPr/>
+          <p:nvPr/>
+        </p:nvSpPr>
+        <p:spPr>
+          <a:xfrm>
+            <a:off x="621792" y="4732020"/>
+            <a:ext cx="310896" cy="310896"/>
+          </a:xfrm>
+          <a:prstGeom prst="ellipse">
+            <a:avLst/>
+          </a:prstGeom>
+          <a:solidFill>
+            <a:srgbClr val="009CD6"/>
+          </a:solidFill>
+          <a:ln>
+            <a:noFill/>
+          </a:ln>
+          <a:effectLst/>
+        </p:spPr>
+        <p:style>
+          <a:lnRef idx="1">
+            <a:schemeClr val="accent1"/>
+          </a:lnRef>
+          <a:fillRef idx="3">
+            <a:schemeClr val="accent1"/>
+          </a:fillRef>
+          <a:effectRef idx="2">
+            <a:schemeClr val="accent1"/>
+          </a:effectRef>
+          <a:fontRef idx="minor">
+            <a:schemeClr val="lt1"/>
+          </a:fontRef>
+        </p:style>
+        <p:txBody>
+          <a:bodyPr rtlCol="0" anchor="ctr" lIns="0" rIns="0" tIns="0" bIns="0" wrap="square"/>
+          <a:lstStyle/>
+          <a:p>
+            <a:pPr algn="ctr"/>
+            <a:r>
+              <a:rPr sz="1300" b="1" i="0">
+                <a:solidFill>
+                  <a:srgbClr val="FFFFFF"/>
+                </a:solidFill>
+                <a:latin typeface="Arial"/>
+              </a:rPr>
+              <a:t>4</a:t>
+            </a:r>
+          </a:p>
+        </p:txBody>
+      </p:sp>
+      <p:sp>
+        <p:nvSpPr>
+          <p:cNvPr id="14" name="TextBox 13"/>
+          <p:cNvSpPr txBox="1"/>
+          <p:nvPr/>
+        </p:nvSpPr>
+        <p:spPr>
+          <a:xfrm>
+            <a:off x="1115568" y="4686300"/>
+            <a:ext cx="10527487" cy="1028699"/>
+          </a:xfrm>
+          <a:prstGeom prst="rect">
+            <a:avLst/>
+          </a:prstGeom>
+          <a:noFill/>
+        </p:spPr>
+        <p:txBody>
+          <a:bodyPr wrap="square">
+            <a:spAutoFit/>
+          </a:bodyPr>
+          <a:lstStyle/>
+          <a:p>
+            <a:pPr>
+              <a:spcAft>
+                <a:spcPts val="300"/>
+              </a:spcAft>
+            </a:pPr>
+            <a:r>
+              <a:rPr sz="1900" b="1" i="0">
+                <a:solidFill>
+                  <a:srgbClr val="1A1A1A"/>
+                </a:solidFill>
+                <a:latin typeface="Arial"/>
+              </a:rPr>
+              <a:t>Target technology standards</a:t>
+            </a:r>
+          </a:p>
+          <a:p>
+            <a:pPr>
+              <a:spcAft>
+                <a:spcPts val="300"/>
+              </a:spcAft>
+            </a:pPr>
+            <a:r>
+              <a:rPr sz="1550" b="0" i="0">
+                <a:solidFill>
+                  <a:srgbClr val="595959"/>
+                </a:solidFill>
+                <a:latin typeface="Arial"/>
+              </a:rPr>
+              <a:t>What everything that follows is built to.</a:t>
+            </a:r>
+          </a:p>
+        </p:txBody>
+      </p:sp>
+      <p:sp>
+        <p:nvSpPr>
+          <p:cNvPr id="15" name="TextBox 14"/>
+          <p:cNvSpPr txBox="1"/>
+          <p:nvPr/>
+        </p:nvSpPr>
+        <p:spPr>
+          <a:xfrm>
+            <a:off x="658368" y="5870448"/>
+            <a:ext cx="10881360" cy="548640"/>
+          </a:xfrm>
+          <a:prstGeom prst="rect">
+            <a:avLst/>
+          </a:prstGeom>
+          <a:noFill/>
+        </p:spPr>
+        <p:txBody>
+          <a:bodyPr wrap="square">
+            <a:spAutoFit/>
+          </a:bodyPr>
+          <a:lstStyle/>
+          <a:p>
+            <a:r>
+              <a:rPr sz="1550" b="1" i="0">
+                <a:solidFill>
+                  <a:srgbClr val="006E96"/>
+                </a:solidFill>
+                <a:latin typeface="Arial"/>
+              </a:rPr>
+              <a:t>The same four layers as the AS-IS — drawn forward, not recorded.</a:t>
+            </a:r>
+          </a:p>
+        </p:txBody>
+      </p:sp>
+      <p:sp>
+        <p:nvSpPr>
+          <p:cNvPr id="16" name="TextBox 15"/>
+          <p:cNvSpPr txBox="1"/>
+          <p:nvPr/>
+        </p:nvSpPr>
+        <p:spPr>
+          <a:xfrm>
+            <a:off x="457200" y="6473952"/>
+            <a:ext cx="7772400" cy="292608"/>
+          </a:xfrm>
+          <a:prstGeom prst="rect">
+            <a:avLst/>
+          </a:prstGeom>
+          <a:noFill/>
+        </p:spPr>
+        <p:txBody>
+          <a:bodyPr wrap="square">
+            <a:spAutoFit/>
+          </a:bodyPr>
+          <a:lstStyle/>
+          <a:p>
+            <a:r>
+              <a:rPr sz="900" b="0" i="0">
+                <a:solidFill>
+                  <a:srgbClr val="595959"/>
+                </a:solidFill>
+                <a:latin typeface="Arial"/>
+              </a:rPr>
+              <a:t>4.5 · Phase 4, Plan — design the target architecture</a:t>
+            </a:r>
+          </a:p>
+        </p:txBody>
+      </p:sp>
+    </p:spTree>
+  </p:cSld>
+  <p:clrMapOvr>
+    <a:masterClrMapping/>
+  </p:clrMapOvr>
+</p:sld>
+</file>
+
+<file path=ppt/slides/slide38.xml><?xml version="1.0" encoding="utf-8"?>
+<p:sld xmlns:a="http://schemas.openxmlformats.org/drawingml/2006/main" xmlns:p="http://schemas.openxmlformats.org/presentationml/2006/main" xmlns:r="http://schemas.openxmlformats.org/officeDocument/2006/relationships">
+  <p:cSld>
+    <p:spTree>
+      <p:nvGrpSpPr>
+        <p:cNvPr id="1" name=""/>
+        <p:cNvGrpSpPr/>
+        <p:nvPr/>
+      </p:nvGrpSpPr>
+      <p:grpSpPr/>
+      <p:sp>
+        <p:nvSpPr>
+          <p:cNvPr id="2" name="Rectangle 1"/>
+          <p:cNvSpPr/>
+          <p:nvPr/>
+        </p:nvSpPr>
+        <p:spPr>
+          <a:xfrm>
+            <a:off x="457200" y="384048"/>
+            <a:ext cx="45720" cy="256032"/>
+          </a:xfrm>
+          <a:prstGeom prst="rect">
+            <a:avLst/>
+          </a:prstGeom>
+          <a:solidFill>
+            <a:srgbClr val="009CD6"/>
+          </a:solidFill>
+          <a:ln>
+            <a:noFill/>
+          </a:ln>
+          <a:effectLst/>
+        </p:spPr>
+        <p:style>
+          <a:lnRef idx="1">
+            <a:schemeClr val="accent1"/>
+          </a:lnRef>
+          <a:fillRef idx="3">
+            <a:schemeClr val="accent1"/>
+          </a:fillRef>
+          <a:effectRef idx="2">
+            <a:schemeClr val="accent1"/>
+          </a:effectRef>
+          <a:fontRef idx="minor">
+            <a:schemeClr val="lt1"/>
+          </a:fontRef>
+        </p:style>
+        <p:txBody>
+          <a:bodyPr rtlCol="0" anchor="ctr"/>
+          <a:lstStyle/>
+          <a:p>
+            <a:pPr algn="ctr"/>
+          </a:p>
+        </p:txBody>
+      </p:sp>
+      <p:sp>
+        <p:nvSpPr>
+          <p:cNvPr id="3" name="TextBox 2"/>
+          <p:cNvSpPr txBox="1"/>
+          <p:nvPr/>
+        </p:nvSpPr>
+        <p:spPr>
+          <a:xfrm>
+            <a:off x="621792" y="274320"/>
+            <a:ext cx="11247120" cy="914400"/>
+          </a:xfrm>
+          <a:prstGeom prst="rect">
+            <a:avLst/>
+          </a:prstGeom>
+          <a:noFill/>
+        </p:spPr>
+        <p:txBody>
+          <a:bodyPr wrap="square">
+            <a:spAutoFit/>
+          </a:bodyPr>
+          <a:lstStyle/>
+          <a:p>
+            <a:r>
+              <a:rPr sz="2800" b="1" i="0">
+                <a:solidFill>
+                  <a:srgbClr val="1A1A1A"/>
+                </a:solidFill>
+                <a:latin typeface="Arial"/>
+              </a:rPr>
+              <a:t>You do not invent the target — you apply your principles to your gaps</a:t>
+            </a:r>
+          </a:p>
+        </p:txBody>
+      </p:sp>
+      <p:sp>
+        <p:nvSpPr>
+          <p:cNvPr id="4" name="TextBox 3"/>
+          <p:cNvSpPr txBox="1"/>
+          <p:nvPr/>
+        </p:nvSpPr>
+        <p:spPr>
+          <a:xfrm>
+            <a:off x="658368" y="1600200"/>
+            <a:ext cx="10881360" cy="2651760"/>
+          </a:xfrm>
+          <a:prstGeom prst="rect">
+            <a:avLst/>
+          </a:prstGeom>
+          <a:noFill/>
+        </p:spPr>
+        <p:txBody>
+          <a:bodyPr wrap="square">
+            <a:spAutoFit/>
+          </a:bodyPr>
+          <a:lstStyle/>
+          <a:p>
+            <a:pPr>
+              <a:spcAft>
+                <a:spcPts val="1200"/>
+              </a:spcAft>
+            </a:pPr>
+            <a:r>
+              <a:rPr sz="2000" b="0" i="0">
+                <a:solidFill>
+                  <a:srgbClr val="1A1A1A"/>
+                </a:solidFill>
+                <a:latin typeface="Arial"/>
+              </a:rPr>
+              <a:t>Once-only says the three learner lists become one, so the target has a single authoritative Learner Registry. Reuse-before-build says education consumes the national identity rather than minting its own, so the target shows the Examination Authority consuming the Identity Authority.</a:t>
+            </a:r>
+          </a:p>
+          <a:p>
+            <a:pPr>
+              <a:spcAft>
+                <a:spcPts val="1200"/>
+              </a:spcAft>
+            </a:pPr>
+            <a:r>
+              <a:rPr sz="2000" b="0" i="0">
+                <a:solidFill>
+                  <a:srgbClr val="1A1A1A"/>
+                </a:solidFill>
+                <a:latin typeface="Arial"/>
+              </a:rPr>
+              <a:t>One-owner-per-domain resolves who owns what. Apply the principles to the current state and the target architecture almost draws itself.</a:t>
+            </a:r>
+          </a:p>
+        </p:txBody>
+      </p:sp>
+      <p:sp>
+        <p:nvSpPr>
+          <p:cNvPr id="5" name="Rounded Rectangle 4"/>
+          <p:cNvSpPr/>
+          <p:nvPr/>
+        </p:nvSpPr>
+        <p:spPr>
+          <a:xfrm>
+            <a:off x="658368" y="4434840"/>
+            <a:ext cx="10881360" cy="1325880"/>
+          </a:xfrm>
+          <a:prstGeom prst="roundRect">
+            <a:avLst>
+              <a:gd name="adj" fmla="val 4500"/>
+            </a:avLst>
+          </a:prstGeom>
+          <a:solidFill>
+            <a:srgbClr val="E5F5FB"/>
+          </a:solidFill>
+          <a:ln>
+            <a:noFill/>
+          </a:ln>
+          <a:effectLst/>
+        </p:spPr>
+        <p:style>
+          <a:lnRef idx="1">
+            <a:schemeClr val="accent1"/>
+          </a:lnRef>
+          <a:fillRef idx="3">
+            <a:schemeClr val="accent1"/>
+          </a:fillRef>
+          <a:effectRef idx="2">
+            <a:schemeClr val="accent1"/>
+          </a:effectRef>
+          <a:fontRef idx="minor">
+            <a:schemeClr val="lt1"/>
+          </a:fontRef>
+        </p:style>
+        <p:txBody>
+          <a:bodyPr rtlCol="0" anchor="ctr"/>
+          <a:lstStyle/>
+          <a:p>
+            <a:pPr algn="ctr"/>
+          </a:p>
+        </p:txBody>
+      </p:sp>
+      <p:sp>
+        <p:nvSpPr>
+          <p:cNvPr id="6" name="TextBox 5"/>
+          <p:cNvSpPr txBox="1"/>
+          <p:nvPr/>
+        </p:nvSpPr>
+        <p:spPr>
+          <a:xfrm>
+            <a:off x="859536" y="4626864"/>
+            <a:ext cx="10479024" cy="1051560"/>
+          </a:xfrm>
+          <a:prstGeom prst="rect">
+            <a:avLst/>
+          </a:prstGeom>
+          <a:noFill/>
+        </p:spPr>
+        <p:txBody>
+          <a:bodyPr wrap="square">
+            <a:spAutoFit/>
+          </a:bodyPr>
+          <a:lstStyle/>
+          <a:p>
+            <a:pPr>
+              <a:spcAft>
+                <a:spcPts val="700"/>
+              </a:spcAft>
+            </a:pPr>
+            <a:r>
+              <a:rPr sz="2300" b="1" i="0">
+                <a:solidFill>
+                  <a:srgbClr val="006E96"/>
+                </a:solidFill>
+                <a:latin typeface="Arial"/>
+              </a:rPr>
+              <a:t>The principles are not decoration. They are the design rules.</a:t>
+            </a:r>
+          </a:p>
+        </p:txBody>
+      </p:sp>
+      <p:sp>
+        <p:nvSpPr>
+          <p:cNvPr id="7" name="TextBox 6"/>
+          <p:cNvSpPr txBox="1"/>
+          <p:nvPr/>
+        </p:nvSpPr>
+        <p:spPr>
+          <a:xfrm>
+            <a:off x="457200" y="6473952"/>
+            <a:ext cx="7772400" cy="292608"/>
+          </a:xfrm>
+          <a:prstGeom prst="rect">
+            <a:avLst/>
+          </a:prstGeom>
+          <a:noFill/>
+        </p:spPr>
+        <p:txBody>
+          <a:bodyPr wrap="square">
+            <a:spAutoFit/>
+          </a:bodyPr>
+          <a:lstStyle/>
+          <a:p>
+            <a:r>
+              <a:rPr sz="900" b="0" i="0">
+                <a:solidFill>
+                  <a:srgbClr val="595959"/>
+                </a:solidFill>
+                <a:latin typeface="Arial"/>
+              </a:rPr>
+              <a:t>4.5 · Phase 4, Plan — design the target architecture</a:t>
+            </a:r>
+          </a:p>
+        </p:txBody>
+      </p:sp>
+    </p:spTree>
+  </p:cSld>
+  <p:clrMapOvr>
+    <a:masterClrMapping/>
+  </p:clrMapOvr>
+</p:sld>
+</file>
+
+<file path=ppt/slides/slide39.xml><?xml version="1.0" encoding="utf-8"?>
+<p:sld xmlns:a="http://schemas.openxmlformats.org/drawingml/2006/main" xmlns:p="http://schemas.openxmlformats.org/presentationml/2006/main" xmlns:r="http://schemas.openxmlformats.org/officeDocument/2006/relationships">
+  <p:cSld>
+    <p:spTree>
+      <p:nvGrpSpPr>
+        <p:cNvPr id="1" name=""/>
+        <p:cNvGrpSpPr/>
+        <p:nvPr/>
+      </p:nvGrpSpPr>
+      <p:grpSpPr/>
+      <p:sp>
+        <p:nvSpPr>
+          <p:cNvPr id="2" name="Rectangle 1"/>
+          <p:cNvSpPr/>
+          <p:nvPr/>
+        </p:nvSpPr>
+        <p:spPr>
+          <a:xfrm>
+            <a:off x="457200" y="384048"/>
+            <a:ext cx="45720" cy="256032"/>
+          </a:xfrm>
+          <a:prstGeom prst="rect">
+            <a:avLst/>
+          </a:prstGeom>
+          <a:solidFill>
+            <a:srgbClr val="009CD6"/>
+          </a:solidFill>
+          <a:ln>
+            <a:noFill/>
+          </a:ln>
+          <a:effectLst/>
+        </p:spPr>
+        <p:style>
+          <a:lnRef idx="1">
+            <a:schemeClr val="accent1"/>
+          </a:lnRef>
+          <a:fillRef idx="3">
+            <a:schemeClr val="accent1"/>
+          </a:fillRef>
+          <a:effectRef idx="2">
+            <a:schemeClr val="accent1"/>
+          </a:effectRef>
+          <a:fontRef idx="minor">
+            <a:schemeClr val="lt1"/>
+          </a:fontRef>
+        </p:style>
+        <p:txBody>
+          <a:bodyPr rtlCol="0" anchor="ctr"/>
+          <a:lstStyle/>
+          <a:p>
+            <a:pPr algn="ctr"/>
+          </a:p>
+        </p:txBody>
+      </p:sp>
+      <p:sp>
+        <p:nvSpPr>
+          <p:cNvPr id="3" name="TextBox 2"/>
+          <p:cNvSpPr txBox="1"/>
+          <p:nvPr/>
+        </p:nvSpPr>
+        <p:spPr>
+          <a:xfrm>
+            <a:off x="621792" y="274320"/>
+            <a:ext cx="11247120" cy="914400"/>
+          </a:xfrm>
+          <a:prstGeom prst="rect">
+            <a:avLst/>
+          </a:prstGeom>
+          <a:noFill/>
+        </p:spPr>
+        <p:txBody>
+          <a:bodyPr wrap="square">
+            <a:spAutoFit/>
+          </a:bodyPr>
+          <a:lstStyle/>
+          <a:p>
+            <a:r>
+              <a:rPr sz="2800" b="1" i="0">
+                <a:solidFill>
+                  <a:srgbClr val="1A1A1A"/>
+                </a:solidFill>
+                <a:latin typeface="Arial"/>
+              </a:rPr>
+              <a:t>The integration map is the one artefact the current state never had</a:t>
+            </a:r>
+          </a:p>
+        </p:txBody>
+      </p:sp>
+      <p:sp>
+        <p:nvSpPr>
+          <p:cNvPr id="4" name="TextBox 3"/>
+          <p:cNvSpPr txBox="1"/>
+          <p:nvPr/>
+        </p:nvSpPr>
+        <p:spPr>
+          <a:xfrm>
+            <a:off x="658368" y="1600200"/>
+            <a:ext cx="10881360" cy="2651760"/>
+          </a:xfrm>
+          <a:prstGeom prst="rect">
+            <a:avLst/>
+          </a:prstGeom>
+          <a:noFill/>
+        </p:spPr>
+        <p:txBody>
+          <a:bodyPr wrap="square">
+            <a:spAutoFit/>
+          </a:bodyPr>
+          <a:lstStyle/>
+          <a:p>
+            <a:pPr>
+              <a:spcAft>
+                <a:spcPts val="1200"/>
+              </a:spcAft>
+            </a:pPr>
+            <a:r>
+              <a:rPr sz="2000" b="0" i="0">
+                <a:solidFill>
+                  <a:srgbClr val="1A1A1A"/>
+                </a:solidFill>
+                <a:latin typeface="Arial"/>
+              </a:rPr>
+              <a:t>It names which bodies exchange which data, over what mechanism, in what priority order. On Progressa: the Examination Authority reads the learner from the Learner Registry and the identity from the Identity Authority, both over the Digital Government Authority's backbone, replacing the paper re-entry.</a:t>
+            </a:r>
+          </a:p>
+          <a:p>
+            <a:pPr>
+              <a:spcAft>
+                <a:spcPts val="1200"/>
+              </a:spcAft>
+            </a:pPr>
+            <a:r>
+              <a:rPr sz="2000" b="0" i="0">
+                <a:solidFill>
+                  <a:srgbClr val="1A1A1A"/>
+                </a:solidFill>
+                <a:latin typeface="Arial"/>
+              </a:rPr>
+              <a:t>It is the target's connective tissue — the picture of a government whose systems finally talk to each other.</a:t>
+            </a:r>
+          </a:p>
+        </p:txBody>
+      </p:sp>
+      <p:sp>
+        <p:nvSpPr>
+          <p:cNvPr id="5" name="Rounded Rectangle 4"/>
+          <p:cNvSpPr/>
+          <p:nvPr/>
+        </p:nvSpPr>
+        <p:spPr>
+          <a:xfrm>
+            <a:off x="658368" y="4434840"/>
+            <a:ext cx="10881360" cy="1325880"/>
+          </a:xfrm>
+          <a:prstGeom prst="roundRect">
+            <a:avLst>
+              <a:gd name="adj" fmla="val 4500"/>
+            </a:avLst>
+          </a:prstGeom>
+          <a:solidFill>
+            <a:srgbClr val="E5F5FB"/>
+          </a:solidFill>
+          <a:ln>
+            <a:noFill/>
+          </a:ln>
+          <a:effectLst/>
+        </p:spPr>
+        <p:style>
+          <a:lnRef idx="1">
+            <a:schemeClr val="accent1"/>
+          </a:lnRef>
+          <a:fillRef idx="3">
+            <a:schemeClr val="accent1"/>
+          </a:fillRef>
+          <a:effectRef idx="2">
+            <a:schemeClr val="accent1"/>
+          </a:effectRef>
+          <a:fontRef idx="minor">
+            <a:schemeClr val="lt1"/>
+          </a:fontRef>
+        </p:style>
+        <p:txBody>
+          <a:bodyPr rtlCol="0" anchor="ctr"/>
+          <a:lstStyle/>
+          <a:p>
+            <a:pPr algn="ctr"/>
+          </a:p>
+        </p:txBody>
+      </p:sp>
+      <p:sp>
+        <p:nvSpPr>
+          <p:cNvPr id="6" name="TextBox 5"/>
+          <p:cNvSpPr txBox="1"/>
+          <p:nvPr/>
+        </p:nvSpPr>
+        <p:spPr>
+          <a:xfrm>
+            <a:off x="859536" y="4626864"/>
+            <a:ext cx="10479024" cy="1051560"/>
+          </a:xfrm>
+          <a:prstGeom prst="rect">
+            <a:avLst/>
+          </a:prstGeom>
+          <a:noFill/>
+        </p:spPr>
+        <p:txBody>
+          <a:bodyPr wrap="square">
+            <a:spAutoFit/>
+          </a:bodyPr>
+          <a:lstStyle/>
+          <a:p>
+            <a:pPr>
+              <a:spcAft>
+                <a:spcPts val="700"/>
+              </a:spcAft>
+            </a:pPr>
+            <a:r>
+              <a:rPr sz="2300" b="1" i="0">
+                <a:solidFill>
+                  <a:srgbClr val="006E96"/>
+                </a:solidFill>
+                <a:latin typeface="Arial"/>
+              </a:rPr>
+              <a:t>A first cut here. The full design is the interoperability knowledge product.</a:t>
+            </a:r>
+          </a:p>
+        </p:txBody>
+      </p:sp>
+      <p:sp>
+        <p:nvSpPr>
+          <p:cNvPr id="7" name="TextBox 6"/>
+          <p:cNvSpPr txBox="1"/>
+          <p:nvPr/>
+        </p:nvSpPr>
+        <p:spPr>
+          <a:xfrm>
+            <a:off x="457200" y="6473952"/>
+            <a:ext cx="7772400" cy="292608"/>
+          </a:xfrm>
+          <a:prstGeom prst="rect">
+            <a:avLst/>
+          </a:prstGeom>
+          <a:noFill/>
+        </p:spPr>
+        <p:txBody>
+          <a:bodyPr wrap="square">
+            <a:spAutoFit/>
+          </a:bodyPr>
+          <a:lstStyle/>
+          <a:p>
+            <a:r>
+              <a:rPr sz="900" b="0" i="0">
+                <a:solidFill>
+                  <a:srgbClr val="595959"/>
+                </a:solidFill>
+                <a:latin typeface="Arial"/>
+              </a:rPr>
+              <a:t>4.5 · Phase 4, Plan — design the target architecture</a:t>
+            </a:r>
+          </a:p>
+        </p:txBody>
+      </p:sp>
+    </p:spTree>
+  </p:cSld>
+  <p:clrMapOvr>
+    <a:masterClrMapping/>
+  </p:clrMapOvr>
+</p:sld>
+</file>
+
+<file path=ppt/slides/slide40.xml><?xml version="1.0" encoding="utf-8"?>
+<p:sld xmlns:a="http://schemas.openxmlformats.org/drawingml/2006/main" xmlns:p="http://schemas.openxmlformats.org/presentationml/2006/main" xmlns:r="http://schemas.openxmlformats.org/officeDocument/2006/relationships">
+  <p:cSld>
+    <p:spTree>
+      <p:nvGrpSpPr>
+        <p:cNvPr id="1" name=""/>
+        <p:cNvGrpSpPr/>
+        <p:nvPr/>
+      </p:nvGrpSpPr>
+      <p:grpSpPr/>
+      <p:sp>
+        <p:nvSpPr>
+          <p:cNvPr id="2" name="Rectangle 1"/>
+          <p:cNvSpPr/>
+          <p:nvPr/>
+        </p:nvSpPr>
+        <p:spPr>
+          <a:xfrm>
+            <a:off x="457200" y="384048"/>
+            <a:ext cx="45720" cy="256032"/>
+          </a:xfrm>
+          <a:prstGeom prst="rect">
+            <a:avLst/>
+          </a:prstGeom>
+          <a:solidFill>
+            <a:srgbClr val="009CD6"/>
+          </a:solidFill>
+          <a:ln>
+            <a:noFill/>
+          </a:ln>
+          <a:effectLst/>
+        </p:spPr>
+        <p:style>
+          <a:lnRef idx="1">
+            <a:schemeClr val="accent1"/>
+          </a:lnRef>
+          <a:fillRef idx="3">
+            <a:schemeClr val="accent1"/>
+          </a:fillRef>
+          <a:effectRef idx="2">
+            <a:schemeClr val="accent1"/>
+          </a:effectRef>
+          <a:fontRef idx="minor">
+            <a:schemeClr val="lt1"/>
+          </a:fontRef>
+        </p:style>
+        <p:txBody>
+          <a:bodyPr rtlCol="0" anchor="ctr"/>
+          <a:lstStyle/>
+          <a:p>
+            <a:pPr algn="ctr"/>
+          </a:p>
+        </p:txBody>
+      </p:sp>
+      <p:sp>
+        <p:nvSpPr>
+          <p:cNvPr id="3" name="TextBox 2"/>
+          <p:cNvSpPr txBox="1"/>
+          <p:nvPr/>
+        </p:nvSpPr>
+        <p:spPr>
+          <a:xfrm>
+            <a:off x="621792" y="274320"/>
+            <a:ext cx="11247120" cy="914400"/>
+          </a:xfrm>
+          <a:prstGeom prst="rect">
+            <a:avLst/>
+          </a:prstGeom>
+          <a:noFill/>
+        </p:spPr>
+        <p:txBody>
+          <a:bodyPr wrap="square">
+            <a:spAutoFit/>
+          </a:bodyPr>
+          <a:lstStyle/>
+          <a:p>
+            <a:r>
+              <a:rPr sz="2800" b="1" i="0">
+                <a:solidFill>
+                  <a:srgbClr val="1A1A1A"/>
+                </a:solidFill>
+                <a:latin typeface="Arial"/>
+              </a:rPr>
+              <a:t>Every target element traces back to a gap and forward to a sourcing call</a:t>
+            </a:r>
+          </a:p>
+        </p:txBody>
+      </p:sp>
+      <p:sp>
+        <p:nvSpPr>
+          <p:cNvPr id="4" name="TextBox 3"/>
+          <p:cNvSpPr txBox="1"/>
+          <p:nvPr/>
+        </p:nvSpPr>
+        <p:spPr>
+          <a:xfrm>
+            <a:off x="658368" y="1600200"/>
+            <a:ext cx="10881360" cy="2651760"/>
+          </a:xfrm>
+          <a:prstGeom prst="rect">
+            <a:avLst/>
+          </a:prstGeom>
+          <a:noFill/>
+        </p:spPr>
+        <p:txBody>
+          <a:bodyPr wrap="square">
+            <a:spAutoFit/>
+          </a:bodyPr>
+          <a:lstStyle/>
+          <a:p>
+            <a:pPr>
+              <a:spcAft>
+                <a:spcPts val="1200"/>
+              </a:spcAft>
+            </a:pPr>
+            <a:r>
+              <a:rPr sz="2000" b="0" i="0">
+                <a:solidFill>
+                  <a:srgbClr val="1A1A1A"/>
+                </a:solidFill>
+                <a:latin typeface="Arial"/>
+              </a:rPr>
+              <a:t>The target must be reachable, not a fantasy. Each element should trace back to a gap it closes, and forward to a sourcing decision — build, buy or share — that obtains it.</a:t>
+            </a:r>
+          </a:p>
+          <a:p>
+            <a:pPr>
+              <a:spcAft>
+                <a:spcPts val="1200"/>
+              </a:spcAft>
+            </a:pPr>
+            <a:r>
+              <a:rPr sz="2000" b="0" i="0">
+                <a:solidFill>
+                  <a:srgbClr val="1A1A1A"/>
+                </a:solidFill>
+                <a:latin typeface="Arial"/>
+              </a:rPr>
+              <a:t>So the target architecture and the sourcing decisions are designed together, and signed off together, as the agreed destination the roadmap then sequences.</a:t>
+            </a:r>
+          </a:p>
+        </p:txBody>
+      </p:sp>
+      <p:sp>
+        <p:nvSpPr>
+          <p:cNvPr id="5" name="Rounded Rectangle 4"/>
+          <p:cNvSpPr/>
+          <p:nvPr/>
+        </p:nvSpPr>
+        <p:spPr>
+          <a:xfrm>
+            <a:off x="658368" y="4434840"/>
+            <a:ext cx="10881360" cy="1325880"/>
+          </a:xfrm>
+          <a:prstGeom prst="roundRect">
+            <a:avLst>
+              <a:gd name="adj" fmla="val 4500"/>
+            </a:avLst>
+          </a:prstGeom>
+          <a:solidFill>
+            <a:srgbClr val="E5F5FB"/>
+          </a:solidFill>
+          <a:ln>
+            <a:noFill/>
+          </a:ln>
+          <a:effectLst/>
+        </p:spPr>
+        <p:style>
+          <a:lnRef idx="1">
+            <a:schemeClr val="accent1"/>
+          </a:lnRef>
+          <a:fillRef idx="3">
+            <a:schemeClr val="accent1"/>
+          </a:fillRef>
+          <a:effectRef idx="2">
+            <a:schemeClr val="accent1"/>
+          </a:effectRef>
+          <a:fontRef idx="minor">
+            <a:schemeClr val="lt1"/>
+          </a:fontRef>
+        </p:style>
+        <p:txBody>
+          <a:bodyPr rtlCol="0" anchor="ctr"/>
+          <a:lstStyle/>
+          <a:p>
+            <a:pPr algn="ctr"/>
+          </a:p>
+        </p:txBody>
+      </p:sp>
+      <p:sp>
+        <p:nvSpPr>
+          <p:cNvPr id="6" name="TextBox 5"/>
+          <p:cNvSpPr txBox="1"/>
+          <p:nvPr/>
+        </p:nvSpPr>
+        <p:spPr>
+          <a:xfrm>
+            <a:off x="859536" y="4626864"/>
+            <a:ext cx="10479024" cy="1051560"/>
+          </a:xfrm>
+          <a:prstGeom prst="rect">
+            <a:avLst/>
+          </a:prstGeom>
+          <a:noFill/>
+        </p:spPr>
+        <p:txBody>
+          <a:bodyPr wrap="square">
+            <a:spAutoFit/>
+          </a:bodyPr>
+          <a:lstStyle/>
+          <a:p>
+            <a:pPr>
+              <a:spcAft>
+                <a:spcPts val="700"/>
+              </a:spcAft>
+            </a:pPr>
+            <a:r>
+              <a:rPr sz="2300" b="1" i="0">
+                <a:solidFill>
+                  <a:srgbClr val="006E96"/>
+                </a:solidFill>
+                <a:latin typeface="Arial"/>
+              </a:rPr>
+              <a:t>A target capability with no way to obtain it is a wish, not an architecture.</a:t>
+            </a:r>
+          </a:p>
+        </p:txBody>
+      </p:sp>
+      <p:sp>
+        <p:nvSpPr>
+          <p:cNvPr id="7" name="TextBox 6"/>
+          <p:cNvSpPr txBox="1"/>
+          <p:nvPr/>
+        </p:nvSpPr>
+        <p:spPr>
+          <a:xfrm>
+            <a:off x="457200" y="6473952"/>
+            <a:ext cx="7772400" cy="292608"/>
+          </a:xfrm>
+          <a:prstGeom prst="rect">
+            <a:avLst/>
+          </a:prstGeom>
+          <a:noFill/>
+        </p:spPr>
+        <p:txBody>
+          <a:bodyPr wrap="square">
+            <a:spAutoFit/>
+          </a:bodyPr>
+          <a:lstStyle/>
+          <a:p>
+            <a:r>
+              <a:rPr sz="900" b="0" i="0">
+                <a:solidFill>
+                  <a:srgbClr val="595959"/>
+                </a:solidFill>
+                <a:latin typeface="Arial"/>
+              </a:rPr>
+              <a:t>4.5 · Phase 4, Plan — design the target architecture</a:t>
+            </a:r>
+          </a:p>
+        </p:txBody>
+      </p:sp>
+    </p:spTree>
+  </p:cSld>
+  <p:clrMapOvr>
+    <a:masterClrMapping/>
+  </p:clrMapOvr>
+</p:sld>
+</file>
+
+<file path=ppt/slides/slide41.xml><?xml version="1.0" encoding="utf-8"?>
+<p:sld xmlns:a="http://schemas.openxmlformats.org/drawingml/2006/main" xmlns:p="http://schemas.openxmlformats.org/presentationml/2006/main" xmlns:r="http://schemas.openxmlformats.org/officeDocument/2006/relationships">
+  <p:cSld>
+    <p:spTree>
+      <p:nvGrpSpPr>
+        <p:cNvPr id="1" name=""/>
+        <p:cNvGrpSpPr/>
+        <p:nvPr/>
+      </p:nvGrpSpPr>
+      <p:grpSpPr/>
+      <p:sp>
+        <p:nvSpPr>
+          <p:cNvPr id="2" name="TextBox 1"/>
+          <p:cNvSpPr txBox="1"/>
+          <p:nvPr/>
+        </p:nvSpPr>
+        <p:spPr>
+          <a:xfrm>
             <a:off x="1005840" y="2103120"/>
             <a:ext cx="10149840" cy="2377440"/>
           </a:xfrm>
@@ -14271,7 +13769,7 @@
 </p:sld>
 </file>
 
-<file path=ppt/slides/slide37.xml><?xml version="1.0" encoding="utf-8"?>
+<file path=ppt/slides/slide42.xml><?xml version="1.0" encoding="utf-8"?>
 <p:sld xmlns:a="http://schemas.openxmlformats.org/drawingml/2006/main" xmlns:p="http://schemas.openxmlformats.org/presentationml/2006/main" xmlns:r="http://schemas.openxmlformats.org/officeDocument/2006/relationships">
   <p:cSld>
     <p:spTree>

--- a/10-Knowledge-Products/KP1-GEA/videos/module_4/en/decks/KP1_M4_4.5_Deck_v0.2.pptx
+++ b/10-Knowledge-Products/KP1-GEA/videos/module_4/en/decks/KP1_M4_4.5_Deck_v0.2.pptx
@@ -11765,7 +11765,7 @@
                 </a:solidFill>
                 <a:latin typeface="Arial"/>
               </a:rPr>
-              <a:t>~4 minutes · standalone video · voice-over on text slides</a:t>
+              <a:t>standalone video · voice-over on text slides</a:t>
             </a:r>
           </a:p>
         </p:txBody>

--- a/10-Knowledge-Products/KP1-GEA/videos/module_4/en/decks/KP1_M4_4.5_Deck_v0.2.pptx
+++ b/10-Knowledge-Products/KP1-GEA/videos/module_4/en/decks/KP1_M4_4.5_Deck_v0.2.pptx
@@ -11629,7 +11629,7 @@
                 </a:solidFill>
                 <a:latin typeface="Arial"/>
               </a:rPr>
-              <a:t>KP1 · MODULE 4 · VIDEO 4.5</a:t>
+              <a:t>MODULE 4 · VIDEO 4.5</a:t>
             </a:r>
           </a:p>
         </p:txBody>
